--- a/Y9_Exploring_Science/9A_Genetics_and_evolution/9A_L05_Genetic_counselling.pptx
+++ b/Y9_Exploring_Science/9A_Genetics_and_evolution/9A_L05_Genetic_counselling.pptx
@@ -131,7 +131,7 @@
           <a:lstStyle/>
           <a:p>
             <a:pPr>
-              <a:defRPr sz="1400" b="0" i="0" u="none" strike="noStrike">
+              <a:defRPr sz="1600" b="0" i="0" u="none" strike="noStrike">
                 <a:solidFill>
                   <a:srgbClr val="0F2A5F"/>
                 </a:solidFill>
@@ -139,7 +139,7 @@
               </a:defRPr>
             </a:pPr>
             <a:r>
-              <a:rPr sz="1400" b="0" i="0" u="none" strike="noStrike">
+              <a:rPr sz="1600" b="0" i="0" u="none" strike="noStrike">
                 <a:solidFill>
                   <a:srgbClr val="0F2A5F"/>
                 </a:solidFill>
@@ -188,7 +188,7 @@
               <a:lstStyle/>
               <a:p>
                 <a:pPr>
-                  <a:defRPr b="0" i="0" strike="noStrike" sz="1000" u="none">
+                  <a:defRPr b="0" i="0" strike="noStrike" sz="1200" u="none">
                     <a:solidFill>
                       <a:srgbClr val="141B26"/>
                     </a:solidFill>
@@ -244,7 +244,7 @@
             <a:lstStyle/>
             <a:p>
               <a:pPr>
-                <a:defRPr b="0" i="0" strike="noStrike" sz="1000" u="none">
+                <a:defRPr b="0" i="0" strike="noStrike" sz="1200" u="none">
                   <a:solidFill>
                     <a:srgbClr val="141B26"/>
                   </a:solidFill>
@@ -292,7 +292,7 @@
           <a:lstStyle/>
           <a:p>
             <a:pPr>
-              <a:defRPr sz="1100" b="0" i="0" u="none" strike="noStrike">
+              <a:defRPr sz="1300" b="0" i="0" u="none" strike="noStrike">
                 <a:solidFill>
                   <a:srgbClr val="141B26"/>
                 </a:solidFill>
@@ -333,7 +333,7 @@
               <a:lstStyle/>
               <a:p>
                 <a:pPr>
-                  <a:defRPr sz="1100" b="0" i="0" u="none" strike="noStrike">
+                  <a:defRPr sz="1300" b="0" i="0" u="none" strike="noStrike">
                     <a:solidFill>
                       <a:srgbClr val="141B26"/>
                     </a:solidFill>
@@ -341,7 +341,7 @@
                   </a:defRPr>
                 </a:pPr>
                 <a:r>
-                  <a:rPr sz="1100" b="0" i="0" u="none" strike="noStrike">
+                  <a:rPr sz="1300" b="0" i="0" u="none" strike="noStrike">
                     <a:solidFill>
                       <a:srgbClr val="141B26"/>
                     </a:solidFill>
@@ -373,7 +373,7 @@
           <a:lstStyle/>
           <a:p>
             <a:pPr>
-              <a:defRPr sz="1100" b="0" i="0" u="none" strike="noStrike">
+              <a:defRPr sz="1300" b="0" i="0" u="none" strike="noStrike">
                 <a:solidFill>
                   <a:srgbClr val="141B26"/>
                 </a:solidFill>
@@ -2032,7 +2032,7 @@
         <p:spPr>
           <a:xfrm>
             <a:off x="548640" y="3657600"/>
-            <a:ext cx="10515600" cy="914400"/>
+            <a:ext cx="10515600" cy="1097280"/>
           </a:xfrm>
           <a:prstGeom prst="rect">
             <a:avLst/>
@@ -2045,7 +2045,7 @@
           <a:lstStyle>
             <a:lvl1pPr indent="0" marL="0">
               <a:buNone/>
-              <a:defRPr lang="en-US" sz="2000" dirty="0">
+              <a:defRPr lang="en-US" sz="2400" dirty="0">
                 <a:solidFill>
                   <a:srgbClr val="FFFFFF"/>
                 </a:solidFill>
@@ -2056,7 +2056,7 @@
             <a:pPr indent="0" marL="0">
               <a:buNone/>
             </a:pPr>
-            <a:endParaRPr lang="en-US" sz="2000" dirty="0"/>
+            <a:endParaRPr lang="en-US" sz="2400" dirty="0"/>
           </a:p>
         </p:txBody>
       </p:sp>
@@ -2156,14 +2156,14 @@
               <a:buNone/>
             </a:pPr>
             <a:r>
-              <a:rPr lang="en-US" sz="900" dirty="0">
+              <a:rPr lang="en-US" sz="1000" dirty="0">
                 <a:solidFill>
                   <a:srgbClr val="5B6574"/>
                 </a:solidFill>
               </a:rPr>
               <a:t>Year 9 Science  |  9A Genetics and evolution  |  Lesson 5: Genetic counselling</a:t>
             </a:r>
-            <a:endParaRPr lang="en-US" sz="900" dirty="0"/>
+            <a:endParaRPr lang="en-US" sz="1000" dirty="0"/>
           </a:p>
         </p:txBody>
       </p:sp>
@@ -2332,14 +2332,14 @@
               <a:buNone/>
             </a:pPr>
             <a:r>
-              <a:rPr lang="en-US" sz="900" dirty="0">
+              <a:rPr lang="en-US" sz="1000" dirty="0">
                 <a:solidFill>
                   <a:srgbClr val="5B6574"/>
                 </a:solidFill>
               </a:rPr>
               <a:t>Year 9 Science  |  9A Genetics and evolution  |  Lesson 5: Genetic counselling</a:t>
             </a:r>
-            <a:endParaRPr lang="en-US" sz="900" dirty="0"/>
+            <a:endParaRPr lang="en-US" sz="1000" dirty="0"/>
           </a:p>
         </p:txBody>
       </p:sp>
@@ -2508,14 +2508,14 @@
               <a:buNone/>
             </a:pPr>
             <a:r>
-              <a:rPr lang="en-US" sz="900" dirty="0">
+              <a:rPr lang="en-US" sz="1000" dirty="0">
                 <a:solidFill>
                   <a:srgbClr val="5B6574"/>
                 </a:solidFill>
               </a:rPr>
               <a:t>Year 9 Science  |  9A Genetics and evolution  |  Lesson 5: Genetic counselling</a:t>
             </a:r>
-            <a:endParaRPr lang="en-US" sz="900" dirty="0"/>
+            <a:endParaRPr lang="en-US" sz="1000" dirty="0"/>
           </a:p>
         </p:txBody>
       </p:sp>
@@ -2644,7 +2644,7 @@
           <a:lstStyle>
             <a:lvl1pPr indent="0" marL="0">
               <a:buNone/>
-              <a:defRPr lang="en-US" sz="3000" b="1" dirty="0">
+              <a:defRPr lang="en-US" sz="3400" b="1" dirty="0">
                 <a:solidFill>
                   <a:srgbClr val="3A2E00"/>
                 </a:solidFill>
@@ -2655,7 +2655,7 @@
             <a:pPr indent="0" marL="0">
               <a:buNone/>
             </a:pPr>
-            <a:endParaRPr lang="en-US" sz="3000" dirty="0"/>
+            <a:endParaRPr lang="en-US" sz="3400" dirty="0"/>
           </a:p>
         </p:txBody>
       </p:sp>
@@ -3072,14 +3072,14 @@
               <a:buNone/>
             </a:pPr>
             <a:r>
-              <a:rPr lang="en-US" sz="1300" b="1" spc="200" kern="0" dirty="0">
+              <a:rPr lang="en-US" sz="1400" b="1" spc="200" kern="0" dirty="0">
                 <a:solidFill>
                   <a:srgbClr val="F2CE3E"/>
                 </a:solidFill>
               </a:rPr>
               <a:t>YEAR 9 SCIENCE  ·  9A GENETICS AND EVOLUTION  ·  LESSON 5 OF 7</a:t>
             </a:r>
-            <a:endParaRPr lang="en-US" sz="1300" dirty="0"/>
+            <a:endParaRPr lang="en-US" sz="1400" dirty="0"/>
           </a:p>
         </p:txBody>
       </p:sp>
@@ -3132,7 +3132,7 @@
         <p:spPr>
           <a:xfrm>
             <a:off x="548640" y="3657600"/>
-            <a:ext cx="10515600" cy="914400"/>
+            <a:ext cx="10515600" cy="1097280"/>
           </a:xfrm>
           <a:prstGeom prst="rect">
             <a:avLst/>
@@ -3148,14 +3148,14 @@
               <a:buNone/>
             </a:pPr>
             <a:r>
-              <a:rPr lang="en-US" sz="2000" dirty="0">
+              <a:rPr lang="en-US" sz="2400" dirty="0">
                 <a:solidFill>
                   <a:srgbClr val="FFFFFF"/>
                 </a:solidFill>
               </a:rPr>
               <a:t>What can a genetic test tell a family, and who helps them understand it?</a:t>
             </a:r>
-            <a:endParaRPr lang="en-US" sz="2000" dirty="0"/>
+            <a:endParaRPr lang="en-US" sz="2400" dirty="0"/>
           </a:p>
         </p:txBody>
       </p:sp>
@@ -3184,14 +3184,14 @@
               <a:buNone/>
             </a:pPr>
             <a:r>
-              <a:rPr lang="en-US" sz="1200" dirty="0">
+              <a:rPr lang="en-US" sz="1400" dirty="0">
                 <a:solidFill>
                   <a:srgbClr val="C9D3E6"/>
                 </a:solidFill>
               </a:rPr>
               <a:t>Exploring Science International 9  ·  Student Book pages 14 to 15  ·  Workbook pages 10</a:t>
             </a:r>
-            <a:endParaRPr lang="en-US" sz="1200" dirty="0"/>
+            <a:endParaRPr lang="en-US" sz="1400" dirty="0"/>
           </a:p>
         </p:txBody>
       </p:sp>
@@ -3499,23 +3499,21 @@
           <a:ln/>
         </p:spPr>
         <p:txBody>
-          <a:bodyPr wrap="square" lIns="0" tIns="0" rIns="0" bIns="0" rtlCol="0" anchor="t">
-            <a:normAutofit/>
-          </a:bodyPr>
+          <a:bodyPr wrap="square" lIns="0" tIns="0" rIns="0" bIns="0" rtlCol="0" anchor="t"/>
           <a:lstStyle/>
           <a:p>
             <a:pPr indent="0" marL="0">
               <a:buNone/>
             </a:pPr>
             <a:r>
-              <a:rPr lang="en-US" sz="1700" dirty="0">
+              <a:rPr lang="en-US" sz="2000" dirty="0">
                 <a:solidFill>
                   <a:srgbClr val="141B26"/>
                 </a:solidFill>
               </a:rPr>
               <a:t>Core: find the changed sequence; match the terms; explain why early testing helps; predict how many of four children have cystic fibrosis.</a:t>
             </a:r>
-            <a:endParaRPr lang="en-US" sz="1700" dirty="0"/>
+            <a:endParaRPr lang="en-US" sz="2000" dirty="0"/>
           </a:p>
         </p:txBody>
       </p:sp>
@@ -3598,23 +3596,21 @@
           <a:ln/>
         </p:spPr>
         <p:txBody>
-          <a:bodyPr wrap="square" lIns="0" tIns="0" rIns="0" bIns="0" rtlCol="0" anchor="t">
-            <a:normAutofit/>
-          </a:bodyPr>
+          <a:bodyPr wrap="square" lIns="0" tIns="0" rIns="0" bIns="0" rtlCol="0" anchor="t"/>
           <a:lstStyle/>
           <a:p>
             <a:pPr indent="0" marL="0">
               <a:buNone/>
             </a:pPr>
             <a:r>
-              <a:rPr lang="en-US" sz="1700" dirty="0">
+              <a:rPr lang="en-US" sz="2000" dirty="0">
                 <a:solidFill>
                   <a:srgbClr val="141B26"/>
                 </a:solidFill>
               </a:rPr>
               <a:t>Stretch: explain an extra chromosome 21 using gametes; explain the APOE result in simple words.</a:t>
             </a:r>
-            <a:endParaRPr lang="en-US" sz="1700" dirty="0"/>
+            <a:endParaRPr lang="en-US" sz="2000" dirty="0"/>
           </a:p>
         </p:txBody>
       </p:sp>
@@ -3697,23 +3693,21 @@
           <a:ln/>
         </p:spPr>
         <p:txBody>
-          <a:bodyPr wrap="square" lIns="0" tIns="0" rIns="0" bIns="0" rtlCol="0" anchor="t">
-            <a:normAutofit/>
-          </a:bodyPr>
+          <a:bodyPr wrap="square" lIns="0" tIns="0" rIns="0" bIns="0" rtlCol="0" anchor="t"/>
           <a:lstStyle/>
           <a:p>
             <a:pPr indent="0" marL="0">
               <a:buNone/>
             </a:pPr>
             <a:r>
-              <a:rPr lang="en-US" sz="1700" dirty="0">
+              <a:rPr lang="en-US" sz="2000" dirty="0">
                 <a:solidFill>
                   <a:srgbClr val="141B26"/>
                 </a:solidFill>
               </a:rPr>
               <a:t>Challenge: write what you would say to a person with an unusual chromosome result who wants a family; evaluate testing every baby.</a:t>
             </a:r>
-            <a:endParaRPr lang="en-US" sz="1700" dirty="0"/>
+            <a:endParaRPr lang="en-US" sz="2000" dirty="0"/>
           </a:p>
         </p:txBody>
       </p:sp>
@@ -3796,23 +3790,21 @@
           <a:ln/>
         </p:spPr>
         <p:txBody>
-          <a:bodyPr wrap="square" lIns="0" tIns="0" rIns="0" bIns="0" rtlCol="0" anchor="t">
-            <a:normAutofit/>
-          </a:bodyPr>
+          <a:bodyPr wrap="square" lIns="0" tIns="0" rIns="0" bIns="0" rtlCol="0" anchor="t"/>
           <a:lstStyle/>
           <a:p>
             <a:pPr indent="0" marL="0">
               <a:buNone/>
             </a:pPr>
             <a:r>
-              <a:rPr lang="en-US" sz="1700" dirty="0">
+              <a:rPr lang="en-US" sz="2000" dirty="0">
                 <a:solidFill>
                   <a:srgbClr val="141B26"/>
                 </a:solidFill>
               </a:rPr>
               <a:t>Write as a counsellor would: simple words, honest probabilities, kind tone.</a:t>
             </a:r>
-            <a:endParaRPr lang="en-US" sz="1700" dirty="0"/>
+            <a:endParaRPr lang="en-US" sz="2000" dirty="0"/>
           </a:p>
         </p:txBody>
       </p:sp>
@@ -3841,14 +3833,14 @@
               <a:buNone/>
             </a:pPr>
             <a:r>
-              <a:rPr lang="en-US" sz="1300" i="1" dirty="0">
+              <a:rPr lang="en-US" sz="1500" i="1" dirty="0">
                 <a:solidFill>
                   <a:srgbClr val="5B6574"/>
                 </a:solidFill>
               </a:rPr>
               <a:t>Use 'out of 100' to explain any percentage.</a:t>
             </a:r>
-            <a:endParaRPr lang="en-US" sz="1300" dirty="0"/>
+            <a:endParaRPr lang="en-US" sz="1500" dirty="0"/>
           </a:p>
         </p:txBody>
       </p:sp>
@@ -4041,23 +4033,21 @@
           <a:ln/>
         </p:spPr>
         <p:txBody>
-          <a:bodyPr wrap="square" lIns="0" tIns="0" rIns="0" bIns="0" rtlCol="0" anchor="t">
-            <a:normAutofit/>
-          </a:bodyPr>
+          <a:bodyPr wrap="square" lIns="0" tIns="0" rIns="0" bIns="0" rtlCol="0" anchor="t"/>
           <a:lstStyle/>
           <a:p>
             <a:pPr indent="0" marL="0">
               <a:buNone/>
             </a:pPr>
             <a:r>
-              <a:rPr lang="en-US" sz="2200" b="1" dirty="0">
+              <a:rPr lang="en-US" sz="2600" b="1" dirty="0">
                 <a:solidFill>
                   <a:srgbClr val="0F2A5F"/>
                 </a:solidFill>
               </a:rPr>
               <a:t>A genetic test can tell you your chance of getting a disease that has no cure. Would you want to know your result? Why might some people choose not to be tested?</a:t>
             </a:r>
-            <a:endParaRPr lang="en-US" sz="2200" dirty="0"/>
+            <a:endParaRPr lang="en-US" sz="2600" dirty="0"/>
           </a:p>
         </p:txBody>
       </p:sp>
@@ -4106,9 +4096,7 @@
           <a:ln/>
         </p:spPr>
         <p:txBody>
-          <a:bodyPr wrap="square" lIns="0" tIns="0" rIns="0" bIns="0" rtlCol="0" anchor="t">
-            <a:normAutofit/>
-          </a:bodyPr>
+          <a:bodyPr wrap="square" lIns="0" tIns="0" rIns="0" bIns="0" rtlCol="0" anchor="t"/>
           <a:lstStyle/>
           <a:p>
             <a:pPr indent="0" marL="0">
@@ -4118,14 +4106,14 @@
               <a:buNone/>
             </a:pPr>
             <a:r>
-              <a:rPr lang="en-US" sz="1500" b="1" dirty="0">
+              <a:rPr lang="en-US" sz="1800" b="1" dirty="0">
                 <a:solidFill>
                   <a:srgbClr val="7B3A8E"/>
                 </a:solidFill>
               </a:rPr>
               <a:t>Sentence frames</a:t>
             </a:r>
-            <a:endParaRPr lang="en-US" sz="1500" dirty="0"/>
+            <a:endParaRPr lang="en-US" sz="1800" dirty="0"/>
           </a:p>
           <a:p>
             <a:pPr indent="0" marL="0">
@@ -4135,14 +4123,14 @@
               <a:buNone/>
             </a:pPr>
             <a:r>
-              <a:rPr lang="en-US" sz="1500" dirty="0">
+              <a:rPr lang="en-US" sz="1800" dirty="0">
                 <a:solidFill>
                   <a:srgbClr val="141B26"/>
                 </a:solidFill>
               </a:rPr>
               <a:t>I would / would not want to know because ___.</a:t>
             </a:r>
-            <a:endParaRPr lang="en-US" sz="1500" dirty="0"/>
+            <a:endParaRPr lang="en-US" sz="1800" dirty="0"/>
           </a:p>
           <a:p>
             <a:pPr indent="0" marL="0">
@@ -4152,14 +4140,14 @@
               <a:buNone/>
             </a:pPr>
             <a:r>
-              <a:rPr lang="en-US" sz="1500" dirty="0">
+              <a:rPr lang="en-US" sz="1800" dirty="0">
                 <a:solidFill>
                   <a:srgbClr val="141B26"/>
                 </a:solidFill>
               </a:rPr>
               <a:t>Knowing the result could help someone to ___.</a:t>
             </a:r>
-            <a:endParaRPr lang="en-US" sz="1500" dirty="0"/>
+            <a:endParaRPr lang="en-US" sz="1800" dirty="0"/>
           </a:p>
           <a:p>
             <a:pPr indent="0" marL="0">
@@ -4169,14 +4157,14 @@
               <a:buNone/>
             </a:pPr>
             <a:r>
-              <a:rPr lang="en-US" sz="1500" dirty="0">
+              <a:rPr lang="en-US" sz="1800" dirty="0">
                 <a:solidFill>
                   <a:srgbClr val="141B26"/>
                 </a:solidFill>
               </a:rPr>
               <a:t>Some people might not want to know because ___.</a:t>
             </a:r>
-            <a:endParaRPr lang="en-US" sz="1500" dirty="0"/>
+            <a:endParaRPr lang="en-US" sz="1800" dirty="0"/>
           </a:p>
         </p:txBody>
       </p:sp>
@@ -4376,14 +4364,14 @@
               <a:buNone/>
             </a:pPr>
             <a:r>
-              <a:rPr lang="en-US" sz="1400" i="1" dirty="0">
+              <a:rPr lang="en-US" sz="1600" i="1" dirty="0">
                 <a:solidFill>
                   <a:srgbClr val="5B6574"/>
                 </a:solidFill>
               </a:rPr>
               <a:t>On your worksheet exit ticket. Work alone. Hand it in as you leave.</a:t>
             </a:r>
-            <a:endParaRPr lang="en-US" sz="1400" dirty="0"/>
+            <a:endParaRPr lang="en-US" sz="1600" dirty="0"/>
           </a:p>
         </p:txBody>
       </p:sp>
@@ -4396,7 +4384,7 @@
         <p:spPr>
           <a:xfrm>
             <a:off x="548640" y="1828800"/>
-            <a:ext cx="10881360" cy="1188720"/>
+            <a:ext cx="9692640" cy="1188720"/>
           </a:xfrm>
           <a:prstGeom prst="rect">
             <a:avLst/>
@@ -4405,16 +4393,14 @@
           <a:ln/>
         </p:spPr>
         <p:txBody>
-          <a:bodyPr wrap="square" lIns="0" tIns="0" rIns="0" bIns="0" rtlCol="0" anchor="t">
-            <a:normAutofit/>
-          </a:bodyPr>
+          <a:bodyPr wrap="square" lIns="0" tIns="0" rIns="0" bIns="0" rtlCol="0" anchor="t"/>
           <a:lstStyle/>
           <a:p>
             <a:pPr indent="0" marL="0">
               <a:buNone/>
             </a:pPr>
             <a:r>
-              <a:rPr lang="en-US" sz="1800" b="1" dirty="0">
+              <a:rPr lang="en-US" sz="2200" b="1" dirty="0">
                 <a:solidFill>
                   <a:srgbClr val="7B3A8E"/>
                 </a:solidFill>
@@ -4425,14 +4411,14 @@
               <a:buNone/>
             </a:pPr>
             <a:r>
-              <a:rPr lang="en-US" sz="1800" dirty="0">
+              <a:rPr lang="en-US" sz="2200" dirty="0">
                 <a:solidFill>
                   <a:srgbClr val="141B26"/>
                 </a:solidFill>
               </a:rPr>
               <a:t>What does a genetic test look at?</a:t>
             </a:r>
-            <a:endParaRPr lang="en-US" sz="1800" dirty="0"/>
+            <a:endParaRPr lang="en-US" sz="2200" dirty="0"/>
           </a:p>
         </p:txBody>
       </p:sp>
@@ -4445,7 +4431,7 @@
         <p:spPr>
           <a:xfrm>
             <a:off x="548640" y="3017520"/>
-            <a:ext cx="10881360" cy="1188720"/>
+            <a:ext cx="9692640" cy="1188720"/>
           </a:xfrm>
           <a:prstGeom prst="rect">
             <a:avLst/>
@@ -4454,16 +4440,14 @@
           <a:ln/>
         </p:spPr>
         <p:txBody>
-          <a:bodyPr wrap="square" lIns="0" tIns="0" rIns="0" bIns="0" rtlCol="0" anchor="t">
-            <a:normAutofit/>
-          </a:bodyPr>
+          <a:bodyPr wrap="square" lIns="0" tIns="0" rIns="0" bIns="0" rtlCol="0" anchor="t"/>
           <a:lstStyle/>
           <a:p>
             <a:pPr indent="0" marL="0">
               <a:buNone/>
             </a:pPr>
             <a:r>
-              <a:rPr lang="en-US" sz="1800" b="1" dirty="0">
+              <a:rPr lang="en-US" sz="2200" b="1" dirty="0">
                 <a:solidFill>
                   <a:srgbClr val="7B3A8E"/>
                 </a:solidFill>
@@ -4474,14 +4458,14 @@
               <a:buNone/>
             </a:pPr>
             <a:r>
-              <a:rPr lang="en-US" sz="1800" dirty="0">
+              <a:rPr lang="en-US" sz="2200" dirty="0">
                 <a:solidFill>
                   <a:srgbClr val="141B26"/>
                 </a:solidFill>
               </a:rPr>
               <a:t>Both parents carry a faulty gene and each child has a 25% chance of the disorder. Write 25% as a fraction and as a decimal.</a:t>
             </a:r>
-            <a:endParaRPr lang="en-US" sz="1800" dirty="0"/>
+            <a:endParaRPr lang="en-US" sz="2200" dirty="0"/>
           </a:p>
         </p:txBody>
       </p:sp>
@@ -4494,7 +4478,7 @@
         <p:spPr>
           <a:xfrm>
             <a:off x="548640" y="4206240"/>
-            <a:ext cx="10881360" cy="1188720"/>
+            <a:ext cx="9692640" cy="1188720"/>
           </a:xfrm>
           <a:prstGeom prst="rect">
             <a:avLst/>
@@ -4503,16 +4487,14 @@
           <a:ln/>
         </p:spPr>
         <p:txBody>
-          <a:bodyPr wrap="square" lIns="0" tIns="0" rIns="0" bIns="0" rtlCol="0" anchor="t">
-            <a:normAutofit/>
-          </a:bodyPr>
+          <a:bodyPr wrap="square" lIns="0" tIns="0" rIns="0" bIns="0" rtlCol="0" anchor="t"/>
           <a:lstStyle/>
           <a:p>
             <a:pPr indent="0" marL="0">
               <a:buNone/>
             </a:pPr>
             <a:r>
-              <a:rPr lang="en-US" sz="1800" b="1" dirty="0">
+              <a:rPr lang="en-US" sz="2200" b="1" dirty="0">
                 <a:solidFill>
                   <a:srgbClr val="7B3A8E"/>
                 </a:solidFill>
@@ -4523,14 +4505,14 @@
               <a:buNone/>
             </a:pPr>
             <a:r>
-              <a:rPr lang="en-US" sz="1800" dirty="0">
+              <a:rPr lang="en-US" sz="2200" dirty="0">
                 <a:solidFill>
                   <a:srgbClr val="141B26"/>
                 </a:solidFill>
               </a:rPr>
               <a:t>Give one thing a genetic counsellor does.</a:t>
             </a:r>
-            <a:endParaRPr lang="en-US" sz="1800" dirty="0"/>
+            <a:endParaRPr lang="en-US" sz="2200" dirty="0"/>
           </a:p>
         </p:txBody>
       </p:sp>
@@ -4789,7 +4771,7 @@
         <p:spPr>
           <a:xfrm>
             <a:off x="548640" y="1371600"/>
-            <a:ext cx="10881360" cy="4480560"/>
+            <a:ext cx="10881360" cy="4114800"/>
           </a:xfrm>
           <a:prstGeom prst="rect">
             <a:avLst/>
@@ -4798,81 +4780,79 @@
           <a:ln/>
         </p:spPr>
         <p:txBody>
-          <a:bodyPr wrap="square" lIns="0" tIns="0" rIns="0" bIns="0" rtlCol="0" anchor="t">
-            <a:normAutofit/>
-          </a:bodyPr>
+          <a:bodyPr wrap="square" lIns="0" tIns="0" rIns="0" bIns="0" rtlCol="0" anchor="t"/>
           <a:lstStyle/>
           <a:p>
             <a:pPr marL="342900" indent="-342900">
               <a:spcAft>
-                <a:spcPts val="1000"/>
+                <a:spcPts val="1200"/>
               </a:spcAft>
               <a:buSzPct val="100000"/>
               <a:buChar char="✓"/>
             </a:pPr>
             <a:r>
-              <a:rPr lang="en-US" sz="1700" dirty="0">
+              <a:rPr lang="en-US" sz="2000" dirty="0">
                 <a:solidFill>
                   <a:srgbClr val="141B26"/>
                 </a:solidFill>
               </a:rPr>
               <a:t>A gene is a sequence of DNA letters; a changed sequence can make a faulty protein and cause a genetic disorder.</a:t>
             </a:r>
-            <a:endParaRPr lang="en-US" sz="1700" dirty="0"/>
+            <a:endParaRPr lang="en-US" sz="2000" dirty="0"/>
           </a:p>
           <a:p>
             <a:pPr marL="342900" indent="-342900">
               <a:spcAft>
-                <a:spcPts val="1000"/>
+                <a:spcPts val="1200"/>
               </a:spcAft>
               <a:buSzPct val="100000"/>
               <a:buChar char="✓"/>
             </a:pPr>
             <a:r>
-              <a:rPr lang="en-US" sz="1700" dirty="0">
+              <a:rPr lang="en-US" sz="2000" dirty="0">
                 <a:solidFill>
                   <a:srgbClr val="141B26"/>
                 </a:solidFill>
               </a:rPr>
               <a:t>A genetic test reads a gene's sequence or checks a person's chromosomes; babies, patients and couples are tested.</a:t>
             </a:r>
-            <a:endParaRPr lang="en-US" sz="1700" dirty="0"/>
+            <a:endParaRPr lang="en-US" sz="2000" dirty="0"/>
           </a:p>
           <a:p>
             <a:pPr marL="342900" indent="-342900">
               <a:spcAft>
-                <a:spcPts val="1000"/>
+                <a:spcPts val="1200"/>
               </a:spcAft>
               <a:buSzPct val="100000"/>
               <a:buChar char="✓"/>
             </a:pPr>
             <a:r>
-              <a:rPr lang="en-US" sz="1700" dirty="0">
+              <a:rPr lang="en-US" sz="2000" dirty="0">
                 <a:solidFill>
                   <a:srgbClr val="141B26"/>
                 </a:solidFill>
               </a:rPr>
               <a:t>Many results are probabilities: 20% means 20 out of 100, not certain.</a:t>
             </a:r>
-            <a:endParaRPr lang="en-US" sz="1700" dirty="0"/>
+            <a:endParaRPr lang="en-US" sz="2000" dirty="0"/>
           </a:p>
           <a:p>
             <a:pPr marL="342900" indent="-342900">
               <a:spcAft>
-                <a:spcPts val="1000"/>
+                <a:spcPts val="1200"/>
               </a:spcAft>
               <a:buSzPct val="100000"/>
               <a:buChar char="✓"/>
             </a:pPr>
             <a:r>
-              <a:rPr lang="en-US" sz="1700" dirty="0">
+              <a:rPr lang="en-US" sz="2000" dirty="0">
                 <a:solidFill>
                   <a:srgbClr val="141B26"/>
                 </a:solidFill>
               </a:rPr>
               <a:t>A genetic counsellor explains results and probabilities simply; the family makes the decision.</a:t>
             </a:r>
-            <a:endParaRPr lang="en-US" sz="1700" dirty="0"/>
+            <a:endParaRPr lang="en-US" sz="2000" dirty="0"/>
           </a:p>
         </p:txBody>
       </p:sp>
@@ -4901,7 +4881,7 @@
               <a:buNone/>
             </a:pPr>
             <a:r>
-              <a:rPr lang="en-US" sz="1300" b="1" dirty="0">
+              <a:rPr lang="en-US" sz="1500" b="1" dirty="0">
                 <a:solidFill>
                   <a:srgbClr val="7B3A8E"/>
                 </a:solidFill>
@@ -4912,14 +4892,14 @@
               <a:buNone/>
             </a:pPr>
             <a:r>
-              <a:rPr lang="en-US" sz="1300" dirty="0">
+              <a:rPr lang="en-US" sz="1500" dirty="0">
                 <a:solidFill>
                   <a:srgbClr val="141B26"/>
                 </a:solidFill>
               </a:rPr>
               <a:t>Genes and extinction: how changes in the environment can make a species endangered or extinct.</a:t>
             </a:r>
-            <a:endParaRPr lang="en-US" sz="1300" dirty="0"/>
+            <a:endParaRPr lang="en-US" sz="1500" dirty="0"/>
           </a:p>
         </p:txBody>
       </p:sp>
@@ -5187,77 +5167,75 @@
           <a:ln/>
         </p:spPr>
         <p:txBody>
-          <a:bodyPr wrap="square" lIns="0" tIns="0" rIns="0" bIns="0" rtlCol="0" anchor="t">
-            <a:normAutofit/>
-          </a:bodyPr>
+          <a:bodyPr wrap="square" lIns="0" tIns="0" rIns="0" bIns="0" rtlCol="0" anchor="t"/>
           <a:lstStyle/>
           <a:p>
             <a:pPr indent="0" marL="0">
               <a:spcAft>
-                <a:spcPts val="1000"/>
+                <a:spcPts val="1200"/>
               </a:spcAft>
               <a:buNone/>
             </a:pPr>
             <a:r>
-              <a:rPr lang="en-US" sz="2000" dirty="0">
+              <a:rPr lang="en-US" sz="2400" dirty="0">
                 <a:solidFill>
                   <a:srgbClr val="141B26"/>
                 </a:solidFill>
               </a:rPr>
               <a:t>DNA stores information as a code of four letters: A, T, C and G. Two people had the same gene read:</a:t>
             </a:r>
-            <a:endParaRPr lang="en-US" sz="2000" dirty="0"/>
+            <a:endParaRPr lang="en-US" sz="2400" dirty="0"/>
           </a:p>
           <a:p>
             <a:pPr indent="0" marL="0">
               <a:spcAft>
-                <a:spcPts val="1000"/>
+                <a:spcPts val="1200"/>
               </a:spcAft>
               <a:buNone/>
             </a:pPr>
             <a:r>
-              <a:rPr lang="en-US" sz="2000" dirty="0">
+              <a:rPr lang="en-US" sz="2400" dirty="0">
                 <a:solidFill>
                   <a:srgbClr val="141B26"/>
                 </a:solidFill>
               </a:rPr>
               <a:t>P:  CTT CTC GGA TCG CGG GAA ATA TTC</a:t>
             </a:r>
-            <a:endParaRPr lang="en-US" sz="2000" dirty="0"/>
+            <a:endParaRPr lang="en-US" sz="2400" dirty="0"/>
           </a:p>
           <a:p>
             <a:pPr indent="0" marL="0">
               <a:spcAft>
-                <a:spcPts val="1000"/>
+                <a:spcPts val="1200"/>
               </a:spcAft>
               <a:buNone/>
             </a:pPr>
             <a:r>
-              <a:rPr lang="en-US" sz="2000" dirty="0">
+              <a:rPr lang="en-US" sz="2400" dirty="0">
                 <a:solidFill>
                   <a:srgbClr val="141B26"/>
                 </a:solidFill>
               </a:rPr>
               <a:t>R:  CTT CTC GGA TCG CCG GAA ATA TTC</a:t>
             </a:r>
-            <a:endParaRPr lang="en-US" sz="2000" dirty="0"/>
+            <a:endParaRPr lang="en-US" sz="2400" dirty="0"/>
           </a:p>
           <a:p>
             <a:pPr indent="0" marL="0">
               <a:spcAft>
-                <a:spcPts val="1000"/>
+                <a:spcPts val="1200"/>
               </a:spcAft>
               <a:buNone/>
             </a:pPr>
             <a:r>
-              <a:rPr lang="en-US" sz="2000" dirty="0">
+              <a:rPr lang="en-US" sz="2400" dirty="0">
                 <a:solidFill>
                   <a:srgbClr val="141B26"/>
                 </a:solidFill>
               </a:rPr>
               <a:t>1. Find the difference. 2. What could a change in a gene do to a person? 3. Recap: what is a gene?</a:t>
             </a:r>
-            <a:endParaRPr lang="en-US" sz="2000" dirty="0"/>
+            <a:endParaRPr lang="en-US" sz="2400" dirty="0"/>
           </a:p>
         </p:txBody>
       </p:sp>
@@ -5440,8 +5418,8 @@
         </p:nvSpPr>
         <p:spPr>
           <a:xfrm>
-            <a:off x="548640" y="1325880"/>
-            <a:ext cx="5669280" cy="457200"/>
+            <a:off x="548640" y="1280160"/>
+            <a:ext cx="5486400" cy="411480"/>
           </a:xfrm>
           <a:prstGeom prst="rect">
             <a:avLst/>
@@ -5457,14 +5435,14 @@
               <a:buNone/>
             </a:pPr>
             <a:r>
-              <a:rPr lang="en-US" sz="2000" b="1" dirty="0">
+              <a:rPr lang="en-US" sz="2200" b="1" dirty="0">
                 <a:solidFill>
                   <a:srgbClr val="7B3A8E"/>
                 </a:solidFill>
               </a:rPr>
               <a:t>Today I can ...</a:t>
             </a:r>
-            <a:endParaRPr lang="en-US" sz="2000" dirty="0"/>
+            <a:endParaRPr lang="en-US" sz="2200" dirty="0"/>
           </a:p>
         </p:txBody>
       </p:sp>
@@ -5476,8 +5454,8 @@
         </p:nvSpPr>
         <p:spPr>
           <a:xfrm>
-            <a:off x="594360" y="1947672"/>
-            <a:ext cx="292608" cy="292608"/>
+            <a:off x="594360" y="1810512"/>
+            <a:ext cx="310896" cy="310896"/>
           </a:xfrm>
           <a:prstGeom prst="rect">
             <a:avLst/>
@@ -5501,8 +5479,8 @@
         </p:nvSpPr>
         <p:spPr>
           <a:xfrm>
-            <a:off x="1051560" y="1874520"/>
-            <a:ext cx="5120640" cy="868680"/>
+            <a:off x="1097280" y="1737360"/>
+            <a:ext cx="10332720" cy="868680"/>
           </a:xfrm>
           <a:prstGeom prst="rect">
             <a:avLst/>
@@ -5511,23 +5489,21 @@
           <a:ln/>
         </p:spPr>
         <p:txBody>
-          <a:bodyPr wrap="square" lIns="0" tIns="0" rIns="0" bIns="0" rtlCol="0" anchor="t">
-            <a:normAutofit/>
-          </a:bodyPr>
+          <a:bodyPr wrap="square" lIns="0" tIns="0" rIns="0" bIns="0" rtlCol="0" anchor="t"/>
           <a:lstStyle/>
           <a:p>
             <a:pPr indent="0" marL="0">
               <a:buNone/>
             </a:pPr>
             <a:r>
-              <a:rPr lang="en-US" sz="1600" dirty="0">
+              <a:rPr lang="en-US" sz="2000" dirty="0">
                 <a:solidFill>
                   <a:srgbClr val="141B26"/>
                 </a:solidFill>
               </a:rPr>
               <a:t>I can describe what a genetic test looks at and why babies and families may be tested.</a:t>
             </a:r>
-            <a:endParaRPr lang="en-US" sz="1600" dirty="0"/>
+            <a:endParaRPr lang="en-US" sz="2000" dirty="0"/>
           </a:p>
         </p:txBody>
       </p:sp>
@@ -5539,8 +5515,8 @@
         </p:nvSpPr>
         <p:spPr>
           <a:xfrm>
-            <a:off x="594360" y="2907792"/>
-            <a:ext cx="292608" cy="292608"/>
+            <a:off x="594360" y="2679192"/>
+            <a:ext cx="310896" cy="310896"/>
           </a:xfrm>
           <a:prstGeom prst="rect">
             <a:avLst/>
@@ -5564,8 +5540,8 @@
         </p:nvSpPr>
         <p:spPr>
           <a:xfrm>
-            <a:off x="1051560" y="2834640"/>
-            <a:ext cx="5120640" cy="868680"/>
+            <a:off x="1097280" y="2606040"/>
+            <a:ext cx="10332720" cy="868680"/>
           </a:xfrm>
           <a:prstGeom prst="rect">
             <a:avLst/>
@@ -5574,23 +5550,21 @@
           <a:ln/>
         </p:spPr>
         <p:txBody>
-          <a:bodyPr wrap="square" lIns="0" tIns="0" rIns="0" bIns="0" rtlCol="0" anchor="t">
-            <a:normAutofit/>
-          </a:bodyPr>
+          <a:bodyPr wrap="square" lIns="0" tIns="0" rIns="0" bIns="0" rtlCol="0" anchor="t"/>
           <a:lstStyle/>
           <a:p>
             <a:pPr indent="0" marL="0">
               <a:buNone/>
             </a:pPr>
             <a:r>
-              <a:rPr lang="en-US" sz="1600" dirty="0">
+              <a:rPr lang="en-US" sz="2000" dirty="0">
                 <a:solidFill>
                   <a:srgbClr val="141B26"/>
                 </a:solidFill>
               </a:rPr>
               <a:t>I can use probability and my knowledge of genes and chromosomes to explain a genetic test result simply, as a genetic counsellor would.</a:t>
             </a:r>
-            <a:endParaRPr lang="en-US" sz="1600" dirty="0"/>
+            <a:endParaRPr lang="en-US" sz="2000" dirty="0"/>
           </a:p>
         </p:txBody>
       </p:sp>
@@ -5602,8 +5576,8 @@
         </p:nvSpPr>
         <p:spPr>
           <a:xfrm>
-            <a:off x="6583680" y="1325880"/>
-            <a:ext cx="5029200" cy="457200"/>
+            <a:off x="548640" y="3611880"/>
+            <a:ext cx="5486400" cy="411480"/>
           </a:xfrm>
           <a:prstGeom prst="rect">
             <a:avLst/>
@@ -5619,14 +5593,14 @@
               <a:buNone/>
             </a:pPr>
             <a:r>
-              <a:rPr lang="en-US" sz="2000" b="1" dirty="0">
+              <a:rPr lang="en-US" sz="2200" b="1" dirty="0">
                 <a:solidFill>
                   <a:srgbClr val="7B3A8E"/>
                 </a:solidFill>
               </a:rPr>
               <a:t>Key words today</a:t>
             </a:r>
-            <a:endParaRPr lang="en-US" sz="2000" dirty="0"/>
+            <a:endParaRPr lang="en-US" sz="2200" dirty="0"/>
           </a:p>
         </p:txBody>
       </p:sp>
@@ -5638,8 +5612,8 @@
         </p:nvSpPr>
         <p:spPr>
           <a:xfrm>
-            <a:off x="6583680" y="1874520"/>
-            <a:ext cx="5029200" cy="4023360"/>
+            <a:off x="548640" y="4069080"/>
+            <a:ext cx="3515258" cy="1920240"/>
           </a:xfrm>
           <a:prstGeom prst="rect">
             <a:avLst/>
@@ -5648,350 +5622,285 @@
           <a:ln/>
         </p:spPr>
         <p:txBody>
-          <a:bodyPr wrap="square" lIns="0" tIns="0" rIns="0" bIns="0" rtlCol="0" anchor="t">
-            <a:normAutofit/>
-          </a:bodyPr>
+          <a:bodyPr wrap="square" lIns="0" tIns="0" rIns="0" bIns="0" rtlCol="0" anchor="t"/>
+          <a:lstStyle/>
+          <a:p>
+            <a:pPr marL="304800" indent="-304800">
+              <a:spcAft>
+                <a:spcPts val="600"/>
+              </a:spcAft>
+              <a:buSzPct val="100000"/>
+              <a:buChar char="•"/>
+            </a:pPr>
+            <a:r>
+              <a:rPr lang="en-US" sz="2100" b="1" dirty="0">
+                <a:solidFill>
+                  <a:srgbClr val="0F2A5F"/>
+                </a:solidFill>
+              </a:rPr>
+              <a:t>genetic test</a:t>
+            </a:r>
+            <a:endParaRPr lang="en-US" sz="2100" dirty="0"/>
+          </a:p>
+          <a:p>
+            <a:pPr marL="304800" indent="-304800">
+              <a:spcAft>
+                <a:spcPts val="600"/>
+              </a:spcAft>
+              <a:buSzPct val="100000"/>
+              <a:buChar char="•"/>
+            </a:pPr>
+            <a:r>
+              <a:rPr lang="en-US" sz="2100" b="1" dirty="0">
+                <a:solidFill>
+                  <a:srgbClr val="0F2A5F"/>
+                </a:solidFill>
+              </a:rPr>
+              <a:t>genetic counsellor</a:t>
+            </a:r>
+            <a:endParaRPr lang="en-US" sz="2100" dirty="0"/>
+          </a:p>
+          <a:p>
+            <a:pPr marL="304800" indent="-304800">
+              <a:spcAft>
+                <a:spcPts val="600"/>
+              </a:spcAft>
+              <a:buSzPct val="100000"/>
+              <a:buChar char="•"/>
+            </a:pPr>
+            <a:r>
+              <a:rPr lang="en-US" sz="2100" b="1" dirty="0">
+                <a:solidFill>
+                  <a:srgbClr val="0F2A5F"/>
+                </a:solidFill>
+              </a:rPr>
+              <a:t>genetic disorder</a:t>
+            </a:r>
+            <a:endParaRPr lang="en-US" sz="2100" dirty="0"/>
+          </a:p>
+          <a:p>
+            <a:pPr marL="304800" indent="-304800">
+              <a:spcAft>
+                <a:spcPts val="600"/>
+              </a:spcAft>
+              <a:buSzPct val="100000"/>
+              <a:buChar char="•"/>
+            </a:pPr>
+            <a:r>
+              <a:rPr lang="en-US" sz="2100" b="1" dirty="0">
+                <a:solidFill>
+                  <a:srgbClr val="0F2A5F"/>
+                </a:solidFill>
+              </a:rPr>
+              <a:t>DNA sequence</a:t>
+            </a:r>
+            <a:endParaRPr lang="en-US" sz="2100" dirty="0"/>
+          </a:p>
+        </p:txBody>
+      </p:sp>
+      <p:sp>
+        <p:nvSpPr>
+          <p:cNvPr id="12" name="Text 10"/>
+          <p:cNvSpPr txBox="1"/>
+          <p:nvPr/>
+        </p:nvSpPr>
+        <p:spPr>
+          <a:xfrm>
+            <a:off x="4338218" y="4069080"/>
+            <a:ext cx="3515258" cy="1920240"/>
+          </a:xfrm>
+          <a:prstGeom prst="rect">
+            <a:avLst/>
+          </a:prstGeom>
+          <a:noFill/>
+          <a:ln/>
+        </p:spPr>
+        <p:txBody>
+          <a:bodyPr wrap="square" lIns="0" tIns="0" rIns="0" bIns="0" rtlCol="0" anchor="t"/>
+          <a:lstStyle/>
+          <a:p>
+            <a:pPr marL="304800" indent="-304800">
+              <a:spcAft>
+                <a:spcPts val="600"/>
+              </a:spcAft>
+              <a:buSzPct val="100000"/>
+              <a:buChar char="•"/>
+            </a:pPr>
+            <a:r>
+              <a:rPr lang="en-US" sz="2100" b="1" dirty="0">
+                <a:solidFill>
+                  <a:srgbClr val="0F2A5F"/>
+                </a:solidFill>
+              </a:rPr>
+              <a:t>faulty gene</a:t>
+            </a:r>
+            <a:endParaRPr lang="en-US" sz="2100" dirty="0"/>
+          </a:p>
+          <a:p>
+            <a:pPr marL="304800" indent="-304800">
+              <a:spcAft>
+                <a:spcPts val="600"/>
+              </a:spcAft>
+              <a:buSzPct val="100000"/>
+              <a:buChar char="•"/>
+            </a:pPr>
+            <a:r>
+              <a:rPr lang="en-US" sz="2100" b="1" dirty="0">
+                <a:solidFill>
+                  <a:srgbClr val="0F2A5F"/>
+                </a:solidFill>
+              </a:rPr>
+              <a:t>haemoglobin</a:t>
+            </a:r>
+            <a:endParaRPr lang="en-US" sz="2100" dirty="0"/>
+          </a:p>
+          <a:p>
+            <a:pPr marL="304800" indent="-304800">
+              <a:spcAft>
+                <a:spcPts val="600"/>
+              </a:spcAft>
+              <a:buSzPct val="100000"/>
+              <a:buChar char="•"/>
+            </a:pPr>
+            <a:r>
+              <a:rPr lang="en-US" sz="2100" b="1" dirty="0">
+                <a:solidFill>
+                  <a:srgbClr val="0F2A5F"/>
+                </a:solidFill>
+              </a:rPr>
+              <a:t>sickle cell disease</a:t>
+            </a:r>
+            <a:endParaRPr lang="en-US" sz="2100" dirty="0"/>
+          </a:p>
+          <a:p>
+            <a:pPr marL="304800" indent="-304800">
+              <a:spcAft>
+                <a:spcPts val="600"/>
+              </a:spcAft>
+              <a:buSzPct val="100000"/>
+              <a:buChar char="•"/>
+            </a:pPr>
+            <a:r>
+              <a:rPr lang="en-US" sz="2100" b="1" dirty="0">
+                <a:solidFill>
+                  <a:srgbClr val="0F2A5F"/>
+                </a:solidFill>
+              </a:rPr>
+              <a:t>cystic fibrosis</a:t>
+            </a:r>
+            <a:endParaRPr lang="en-US" sz="2100" dirty="0"/>
+          </a:p>
+        </p:txBody>
+      </p:sp>
+      <p:sp>
+        <p:nvSpPr>
+          <p:cNvPr id="13" name="Text 11"/>
+          <p:cNvSpPr txBox="1"/>
+          <p:nvPr/>
+        </p:nvSpPr>
+        <p:spPr>
+          <a:xfrm>
+            <a:off x="8127797" y="4069080"/>
+            <a:ext cx="3515258" cy="1920240"/>
+          </a:xfrm>
+          <a:prstGeom prst="rect">
+            <a:avLst/>
+          </a:prstGeom>
+          <a:noFill/>
+          <a:ln/>
+        </p:spPr>
+        <p:txBody>
+          <a:bodyPr wrap="square" lIns="0" tIns="0" rIns="0" bIns="0" rtlCol="0" anchor="t"/>
+          <a:lstStyle/>
+          <a:p>
+            <a:pPr marL="304800" indent="-304800">
+              <a:spcAft>
+                <a:spcPts val="600"/>
+              </a:spcAft>
+              <a:buSzPct val="100000"/>
+              <a:buChar char="•"/>
+            </a:pPr>
+            <a:r>
+              <a:rPr lang="en-US" sz="2200" b="1" dirty="0">
+                <a:solidFill>
+                  <a:srgbClr val="0F2A5F"/>
+                </a:solidFill>
+              </a:rPr>
+              <a:t>Down's syndrome</a:t>
+            </a:r>
+            <a:endParaRPr lang="en-US" sz="2200" dirty="0"/>
+          </a:p>
+          <a:p>
+            <a:pPr marL="304800" indent="-304800">
+              <a:spcAft>
+                <a:spcPts val="600"/>
+              </a:spcAft>
+              <a:buSzPct val="100000"/>
+              <a:buChar char="•"/>
+            </a:pPr>
+            <a:r>
+              <a:rPr lang="en-US" sz="2200" b="1" dirty="0">
+                <a:solidFill>
+                  <a:srgbClr val="0F2A5F"/>
+                </a:solidFill>
+              </a:rPr>
+              <a:t>probability</a:t>
+            </a:r>
+            <a:endParaRPr lang="en-US" sz="2200" dirty="0"/>
+          </a:p>
+          <a:p>
+            <a:pPr marL="304800" indent="-304800">
+              <a:spcAft>
+                <a:spcPts val="600"/>
+              </a:spcAft>
+              <a:buSzPct val="100000"/>
+              <a:buChar char="•"/>
+            </a:pPr>
+            <a:r>
+              <a:rPr lang="en-US" sz="2200" b="1" dirty="0">
+                <a:solidFill>
+                  <a:srgbClr val="0F2A5F"/>
+                </a:solidFill>
+              </a:rPr>
+              <a:t>chromosome</a:t>
+            </a:r>
+            <a:endParaRPr lang="en-US" sz="2200" dirty="0"/>
+          </a:p>
+        </p:txBody>
+      </p:sp>
+      <p:sp>
+        <p:nvSpPr>
+          <p:cNvPr id="14" name="Text 12"/>
+          <p:cNvSpPr txBox="1"/>
+          <p:nvPr/>
+        </p:nvSpPr>
+        <p:spPr>
+          <a:xfrm>
+            <a:off x="548640" y="6035040"/>
+            <a:ext cx="10881360" cy="320040"/>
+          </a:xfrm>
+          <a:prstGeom prst="rect">
+            <a:avLst/>
+          </a:prstGeom>
+          <a:noFill/>
+          <a:ln/>
+        </p:spPr>
+        <p:txBody>
+          <a:bodyPr wrap="square" lIns="0" tIns="0" rIns="0" bIns="0" rtlCol="0" anchor="ctr"/>
           <a:lstStyle/>
           <a:p>
             <a:pPr indent="0" marL="0">
-              <a:spcAft>
-                <a:spcPts val="500"/>
-              </a:spcAft>
-              <a:buNone/>
-            </a:pPr>
-            <a:r>
-              <a:rPr lang="en-US" sz="1300" b="1" dirty="0">
-                <a:solidFill>
-                  <a:srgbClr val="0F2A5F"/>
-                </a:solidFill>
-              </a:rPr>
-              <a:t>genetic test</a:t>
-            </a:r>
-            <a:pPr indent="0" marL="0">
-              <a:spcAft>
-                <a:spcPts val="500"/>
-              </a:spcAft>
-              <a:buNone/>
-            </a:pPr>
-            <a:r>
-              <a:rPr lang="en-US" sz="1300" dirty="0">
-                <a:solidFill>
-                  <a:srgbClr val="141B26"/>
-                </a:solidFill>
-              </a:rPr>
-              <a:t>  a test that looks at a person's DNA sequence or chromosomes</a:t>
-            </a:r>
-            <a:endParaRPr lang="en-US" sz="1300" dirty="0"/>
-          </a:p>
-          <a:p>
-            <a:pPr indent="0" marL="0">
-              <a:spcAft>
-                <a:spcPts val="500"/>
-              </a:spcAft>
-              <a:buNone/>
-            </a:pPr>
-            <a:r>
-              <a:rPr lang="en-US" sz="1300" b="1" dirty="0">
-                <a:solidFill>
-                  <a:srgbClr val="0F2A5F"/>
-                </a:solidFill>
-              </a:rPr>
-              <a:t>genetic counsellor</a:t>
-            </a:r>
-            <a:pPr indent="0" marL="0">
-              <a:spcAft>
-                <a:spcPts val="500"/>
-              </a:spcAft>
-              <a:buNone/>
-            </a:pPr>
-            <a:r>
-              <a:rPr lang="en-US" sz="1300" dirty="0">
-                <a:solidFill>
-                  <a:srgbClr val="141B26"/>
-                </a:solidFill>
-              </a:rPr>
-              <a:t>  a person trained to explain genetic test results and the chances of passing on a condition</a:t>
-            </a:r>
-            <a:endParaRPr lang="en-US" sz="1300" dirty="0"/>
-          </a:p>
-          <a:p>
-            <a:pPr indent="0" marL="0">
-              <a:spcAft>
-                <a:spcPts val="500"/>
-              </a:spcAft>
-              <a:buNone/>
-            </a:pPr>
-            <a:r>
-              <a:rPr lang="en-US" sz="1300" b="1" dirty="0">
-                <a:solidFill>
-                  <a:srgbClr val="0F2A5F"/>
-                </a:solidFill>
-              </a:rPr>
-              <a:t>genetic disorder</a:t>
-            </a:r>
-            <a:pPr indent="0" marL="0">
-              <a:spcAft>
-                <a:spcPts val="500"/>
-              </a:spcAft>
-              <a:buNone/>
-            </a:pPr>
-            <a:r>
-              <a:rPr lang="en-US" sz="1300" dirty="0">
-                <a:solidFill>
-                  <a:srgbClr val="141B26"/>
-                </a:solidFill>
-              </a:rPr>
-              <a:t>  a condition caused by a faulty gene or an unusual set of chromosomes</a:t>
-            </a:r>
-            <a:endParaRPr lang="en-US" sz="1300" dirty="0"/>
-          </a:p>
-          <a:p>
-            <a:pPr indent="0" marL="0">
-              <a:spcAft>
-                <a:spcPts val="500"/>
-              </a:spcAft>
-              <a:buNone/>
-            </a:pPr>
-            <a:r>
-              <a:rPr lang="en-US" sz="1300" b="1" dirty="0">
-                <a:solidFill>
-                  <a:srgbClr val="0F2A5F"/>
-                </a:solidFill>
-              </a:rPr>
-              <a:t>DNA sequence</a:t>
-            </a:r>
-            <a:pPr indent="0" marL="0">
-              <a:spcAft>
-                <a:spcPts val="500"/>
-              </a:spcAft>
-              <a:buNone/>
-            </a:pPr>
-            <a:r>
-              <a:rPr lang="en-US" sz="1300" dirty="0">
-                <a:solidFill>
-                  <a:srgbClr val="141B26"/>
-                </a:solidFill>
-              </a:rPr>
-              <a:t>  the order of the four letters (A, T, C, G) along a DNA molecule</a:t>
-            </a:r>
-            <a:endParaRPr lang="en-US" sz="1300" dirty="0"/>
-          </a:p>
-          <a:p>
-            <a:pPr indent="0" marL="0">
-              <a:spcAft>
-                <a:spcPts val="500"/>
-              </a:spcAft>
-              <a:buNone/>
-            </a:pPr>
-            <a:r>
-              <a:rPr lang="en-US" sz="1300" b="1" dirty="0">
-                <a:solidFill>
-                  <a:srgbClr val="0F2A5F"/>
-                </a:solidFill>
-              </a:rPr>
-              <a:t>faulty gene</a:t>
-            </a:r>
-            <a:pPr indent="0" marL="0">
-              <a:spcAft>
-                <a:spcPts val="500"/>
-              </a:spcAft>
-              <a:buNone/>
-            </a:pPr>
-            <a:r>
-              <a:rPr lang="en-US" sz="1300" dirty="0">
-                <a:solidFill>
-                  <a:srgbClr val="141B26"/>
-                </a:solidFill>
-              </a:rPr>
-              <a:t>  a gene whose sequence has changed so that it no longer works properly</a:t>
-            </a:r>
-            <a:endParaRPr lang="en-US" sz="1300" dirty="0"/>
-          </a:p>
-          <a:p>
-            <a:pPr indent="0" marL="0">
-              <a:spcAft>
-                <a:spcPts val="500"/>
-              </a:spcAft>
-              <a:buNone/>
-            </a:pPr>
-            <a:r>
-              <a:rPr lang="en-US" sz="1300" b="1" dirty="0">
-                <a:solidFill>
-                  <a:srgbClr val="0F2A5F"/>
-                </a:solidFill>
-              </a:rPr>
-              <a:t>haemoglobin</a:t>
-            </a:r>
-            <a:pPr indent="0" marL="0">
-              <a:spcAft>
-                <a:spcPts val="500"/>
-              </a:spcAft>
-              <a:buNone/>
-            </a:pPr>
-            <a:r>
-              <a:rPr lang="en-US" sz="1300" dirty="0">
-                <a:solidFill>
-                  <a:srgbClr val="141B26"/>
-                </a:solidFill>
-              </a:rPr>
-              <a:t>  the protein in red blood cells that carries oxygen</a:t>
-            </a:r>
-            <a:endParaRPr lang="en-US" sz="1300" dirty="0"/>
-          </a:p>
-          <a:p>
-            <a:pPr indent="0" marL="0">
-              <a:spcAft>
-                <a:spcPts val="500"/>
-              </a:spcAft>
-              <a:buNone/>
-            </a:pPr>
-            <a:r>
-              <a:rPr lang="en-US" sz="1300" b="1" dirty="0">
-                <a:solidFill>
-                  <a:srgbClr val="0F2A5F"/>
-                </a:solidFill>
-              </a:rPr>
-              <a:t>sickle cell disease</a:t>
-            </a:r>
-            <a:pPr indent="0" marL="0">
-              <a:spcAft>
-                <a:spcPts val="500"/>
-              </a:spcAft>
-              <a:buNone/>
-            </a:pPr>
-            <a:r>
-              <a:rPr lang="en-US" sz="1300" dirty="0">
-                <a:solidFill>
-                  <a:srgbClr val="141B26"/>
-                </a:solidFill>
-              </a:rPr>
-              <a:t>  a genetic disorder in which faulty haemoglobin makes red blood cells sickle-shaped</a:t>
-            </a:r>
-            <a:endParaRPr lang="en-US" sz="1300" dirty="0"/>
-          </a:p>
-          <a:p>
-            <a:pPr indent="0" marL="0">
-              <a:spcAft>
-                <a:spcPts val="500"/>
-              </a:spcAft>
-              <a:buNone/>
-            </a:pPr>
-            <a:r>
-              <a:rPr lang="en-US" sz="1300" b="1" dirty="0">
-                <a:solidFill>
-                  <a:srgbClr val="0F2A5F"/>
-                </a:solidFill>
-              </a:rPr>
-              <a:t>cystic fibrosis</a:t>
-            </a:r>
-            <a:pPr indent="0" marL="0">
-              <a:spcAft>
-                <a:spcPts val="500"/>
-              </a:spcAft>
-              <a:buNone/>
-            </a:pPr>
-            <a:r>
-              <a:rPr lang="en-US" sz="1300" dirty="0">
-                <a:solidFill>
-                  <a:srgbClr val="141B26"/>
-                </a:solidFill>
-              </a:rPr>
-              <a:t>  a genetic disorder in which thick mucus builds up in the lungs and gut</a:t>
-            </a:r>
-            <a:endParaRPr lang="en-US" sz="1300" dirty="0"/>
-          </a:p>
-          <a:p>
-            <a:pPr indent="0" marL="0">
-              <a:spcAft>
-                <a:spcPts val="500"/>
-              </a:spcAft>
-              <a:buNone/>
-            </a:pPr>
-            <a:r>
-              <a:rPr lang="en-US" sz="1300" b="1" dirty="0">
-                <a:solidFill>
-                  <a:srgbClr val="0F2A5F"/>
-                </a:solidFill>
-              </a:rPr>
-              <a:t>Down's syndrome</a:t>
-            </a:r>
-            <a:pPr indent="0" marL="0">
-              <a:spcAft>
-                <a:spcPts val="500"/>
-              </a:spcAft>
-              <a:buNone/>
-            </a:pPr>
-            <a:r>
-              <a:rPr lang="en-US" sz="1300" dirty="0">
-                <a:solidFill>
-                  <a:srgbClr val="141B26"/>
-                </a:solidFill>
-              </a:rPr>
-              <a:t>  a condition caused by an extra copy of chromosome 21</a:t>
-            </a:r>
-            <a:endParaRPr lang="en-US" sz="1300" dirty="0"/>
-          </a:p>
-          <a:p>
-            <a:pPr indent="0" marL="0">
-              <a:spcAft>
-                <a:spcPts val="500"/>
-              </a:spcAft>
-              <a:buNone/>
-            </a:pPr>
-            <a:r>
-              <a:rPr lang="en-US" sz="1300" b="1" dirty="0">
-                <a:solidFill>
-                  <a:srgbClr val="0F2A5F"/>
-                </a:solidFill>
-              </a:rPr>
-              <a:t>probability</a:t>
-            </a:r>
-            <a:pPr indent="0" marL="0">
-              <a:spcAft>
-                <a:spcPts val="500"/>
-              </a:spcAft>
-              <a:buNone/>
-            </a:pPr>
-            <a:r>
-              <a:rPr lang="en-US" sz="1300" dirty="0">
-                <a:solidFill>
-                  <a:srgbClr val="141B26"/>
-                </a:solidFill>
-              </a:rPr>
-              <a:t>  the chance of something happening, e.g. 25% or 1/4</a:t>
-            </a:r>
-            <a:endParaRPr lang="en-US" sz="1300" dirty="0"/>
-          </a:p>
-          <a:p>
-            <a:pPr indent="0" marL="0">
-              <a:spcAft>
-                <a:spcPts val="500"/>
-              </a:spcAft>
-              <a:buNone/>
-            </a:pPr>
-            <a:r>
-              <a:rPr lang="en-US" sz="1300" b="1" dirty="0">
-                <a:solidFill>
-                  <a:srgbClr val="0F2A5F"/>
-                </a:solidFill>
-              </a:rPr>
-              <a:t>chromosome</a:t>
-            </a:r>
-            <a:pPr indent="0" marL="0">
-              <a:spcAft>
-                <a:spcPts val="500"/>
-              </a:spcAft>
-              <a:buNone/>
-            </a:pPr>
-            <a:r>
-              <a:rPr lang="en-US" sz="1300" dirty="0">
-                <a:solidFill>
-                  <a:srgbClr val="141B26"/>
-                </a:solidFill>
-              </a:rPr>
-              <a:t>  a structure in the nucleus made of one long DNA molecule</a:t>
-            </a:r>
-            <a:endParaRPr lang="en-US" sz="1300" dirty="0"/>
+              <a:buNone/>
+            </a:pPr>
+            <a:r>
+              <a:rPr lang="en-US" sz="1400" i="1" dirty="0">
+                <a:solidFill>
+                  <a:srgbClr val="5B6574"/>
+                </a:solidFill>
+              </a:rPr>
+              <a:t>Meanings are in the key words box on your worksheet.</a:t>
+            </a:r>
+            <a:endParaRPr lang="en-US" sz="1400" dirty="0"/>
           </a:p>
         </p:txBody>
       </p:sp>
@@ -6175,7 +6084,7 @@
         <p:spPr>
           <a:xfrm>
             <a:off x="548640" y="1371600"/>
-            <a:ext cx="5394960" cy="2377440"/>
+            <a:ext cx="5394960" cy="2651760"/>
           </a:xfrm>
           <a:prstGeom prst="rect">
             <a:avLst/>
@@ -6184,23 +6093,21 @@
           <a:ln/>
         </p:spPr>
         <p:txBody>
-          <a:bodyPr wrap="square" lIns="0" tIns="0" rIns="0" bIns="0" rtlCol="0" anchor="t">
-            <a:normAutofit/>
-          </a:bodyPr>
+          <a:bodyPr wrap="square" lIns="0" tIns="0" rIns="0" bIns="0" rtlCol="0" anchor="t"/>
           <a:lstStyle/>
           <a:p>
             <a:pPr indent="0" marL="0">
               <a:buNone/>
             </a:pPr>
             <a:r>
-              <a:rPr lang="en-US" sz="2800" b="1" dirty="0">
+              <a:rPr lang="en-US" sz="2500" b="1" dirty="0">
                 <a:solidFill>
                   <a:srgbClr val="0F2A5F"/>
                 </a:solidFill>
               </a:rPr>
               <a:t>In many countries, every newborn baby has a few drops of blood taken from its heel in the first week. The blood is tested for several genetic disorders. Why test a baby who looks healthy?</a:t>
             </a:r>
-            <a:endParaRPr lang="en-US" sz="2800" dirty="0"/>
+            <a:endParaRPr lang="en-US" sz="2500" dirty="0"/>
           </a:p>
         </p:txBody>
       </p:sp>
@@ -6212,8 +6119,8 @@
         </p:nvSpPr>
         <p:spPr>
           <a:xfrm>
-            <a:off x="548640" y="3794760"/>
-            <a:ext cx="5394960" cy="2103120"/>
+            <a:off x="548640" y="4114800"/>
+            <a:ext cx="5394960" cy="1828800"/>
           </a:xfrm>
           <a:prstGeom prst="rect">
             <a:avLst/>
@@ -6222,9 +6129,7 @@
           <a:ln/>
         </p:spPr>
         <p:txBody>
-          <a:bodyPr wrap="square" lIns="0" tIns="0" rIns="0" bIns="0" rtlCol="0" anchor="t">
-            <a:normAutofit/>
-          </a:bodyPr>
+          <a:bodyPr wrap="square" lIns="0" tIns="0" rIns="0" bIns="0" rtlCol="0" anchor="t"/>
           <a:lstStyle/>
           <a:p>
             <a:pPr indent="0" marL="0">
@@ -6234,14 +6139,14 @@
               <a:buNone/>
             </a:pPr>
             <a:r>
-              <a:rPr lang="en-US" sz="1600" dirty="0">
+              <a:rPr lang="en-US" sz="2000" dirty="0">
                 <a:solidFill>
                   <a:srgbClr val="141B26"/>
                 </a:solidFill>
               </a:rPr>
               <a:t>Talk to a partner: what could doctors do differently if they knew early?</a:t>
             </a:r>
-            <a:endParaRPr lang="en-US" sz="1600" dirty="0"/>
+            <a:endParaRPr lang="en-US" sz="2000" dirty="0"/>
           </a:p>
         </p:txBody>
       </p:sp>
@@ -6278,7 +6183,7 @@
         <p:spPr>
           <a:xfrm>
             <a:off x="6309360" y="5417820"/>
-            <a:ext cx="5303520" cy="502920"/>
+            <a:ext cx="5303520" cy="548640"/>
           </a:xfrm>
           <a:prstGeom prst="rect">
             <a:avLst/>
@@ -6294,7 +6199,7 @@
               <a:buNone/>
             </a:pPr>
             <a:r>
-              <a:rPr lang="en-US" sz="1100" dirty="0">
+              <a:rPr lang="en-US" sz="1300" dirty="0">
                 <a:solidFill>
                   <a:srgbClr val="141B26"/>
                 </a:solidFill>
@@ -6304,21 +6209,21 @@
             <a:pPr algn="l" indent="0" marL="0">
               <a:buNone/>
             </a:pPr>
-            <a:endParaRPr lang="en-US" sz="1100" dirty="0"/>
+            <a:endParaRPr lang="en-US" sz="1300" dirty="0"/>
           </a:p>
           <a:p>
             <a:pPr algn="l" indent="0" marL="0">
               <a:buNone/>
             </a:pPr>
             <a:r>
-              <a:rPr lang="en-US" sz="800" dirty="0">
+              <a:rPr lang="en-US" sz="900" dirty="0">
                 <a:solidFill>
                   <a:srgbClr val="5B6574"/>
                 </a:solidFill>
               </a:rPr>
               <a:t>Image: National Institutes of Health (NIH), Public domain, via Wikimedia Commons</a:t>
             </a:r>
-            <a:endParaRPr lang="en-US" sz="1100" dirty="0"/>
+            <a:endParaRPr lang="en-US" sz="1300" dirty="0"/>
           </a:p>
         </p:txBody>
       </p:sp>
@@ -6501,8 +6406,8 @@
         </p:nvSpPr>
         <p:spPr>
           <a:xfrm>
-            <a:off x="548640" y="6053328"/>
-            <a:ext cx="9601200" cy="292608"/>
+            <a:off x="548640" y="6035040"/>
+            <a:ext cx="9601200" cy="310896"/>
           </a:xfrm>
           <a:prstGeom prst="rect">
             <a:avLst/>
@@ -6518,7 +6423,7 @@
               <a:buNone/>
             </a:pPr>
             <a:r>
-              <a:rPr lang="en-US" sz="1200" b="1" dirty="0">
+              <a:rPr lang="en-US" sz="1400" b="1" dirty="0">
                 <a:solidFill>
                   <a:srgbClr val="7B3A8E"/>
                 </a:solidFill>
@@ -6529,14 +6434,14 @@
               <a:buNone/>
             </a:pPr>
             <a:r>
-              <a:rPr lang="en-US" sz="1200" dirty="0">
+              <a:rPr lang="en-US" sz="1400" dirty="0">
                 <a:solidFill>
                   <a:srgbClr val="7B3A8E"/>
                 </a:solidFill>
               </a:rPr>
               <a:t>DNA sequence   ·   faulty gene   ·   haemoglobin</a:t>
             </a:r>
-            <a:endParaRPr lang="en-US" sz="1200" dirty="0"/>
+            <a:endParaRPr lang="en-US" sz="1400" dirty="0"/>
           </a:p>
         </p:txBody>
       </p:sp>
@@ -6577,7 +6482,7 @@
                         <a:buNone/>
                       </a:pPr>
                       <a:r>
-                        <a:rPr lang="en-US" sz="1300" b="1" dirty="0">
+                        <a:rPr lang="en-US" sz="1500" b="1" dirty="0">
                           <a:solidFill>
                             <a:srgbClr val="FFFFFF"/>
                           </a:solidFill>
@@ -6587,7 +6492,7 @@
                         </a:rPr>
                         <a:t>Person</a:t>
                       </a:r>
-                      <a:endParaRPr lang="en-US" sz="1300" dirty="0">
+                      <a:endParaRPr lang="en-US" sz="1500" dirty="0">
                         <a:latin typeface="Calibri" charset="0"/>
                         <a:ea typeface="Calibri" charset="0"/>
                         <a:cs typeface="Calibri" charset="0"/>
@@ -6645,7 +6550,7 @@
                         <a:buNone/>
                       </a:pPr>
                       <a:r>
-                        <a:rPr lang="en-US" sz="1300" b="1" dirty="0">
+                        <a:rPr lang="en-US" sz="1500" b="1" dirty="0">
                           <a:solidFill>
                             <a:srgbClr val="FFFFFF"/>
                           </a:solidFill>
@@ -6655,7 +6560,7 @@
                         </a:rPr>
                         <a:t>Sequence of part of the haemoglobin gene</a:t>
                       </a:r>
-                      <a:endParaRPr lang="en-US" sz="1300" dirty="0">
+                      <a:endParaRPr lang="en-US" sz="1500" dirty="0">
                         <a:latin typeface="Calibri" charset="0"/>
                         <a:ea typeface="Calibri" charset="0"/>
                         <a:cs typeface="Calibri" charset="0"/>
@@ -6713,7 +6618,7 @@
                         <a:buNone/>
                       </a:pPr>
                       <a:r>
-                        <a:rPr lang="en-US" sz="1300" b="1" dirty="0">
+                        <a:rPr lang="en-US" sz="1500" b="1" dirty="0">
                           <a:solidFill>
                             <a:srgbClr val="FFFFFF"/>
                           </a:solidFill>
@@ -6723,7 +6628,7 @@
                         </a:rPr>
                         <a:t>Protein made</a:t>
                       </a:r>
-                      <a:endParaRPr lang="en-US" sz="1300" dirty="0">
+                      <a:endParaRPr lang="en-US" sz="1500" dirty="0">
                         <a:latin typeface="Calibri" charset="0"/>
                         <a:ea typeface="Calibri" charset="0"/>
                         <a:cs typeface="Calibri" charset="0"/>
@@ -6783,7 +6688,7 @@
                         <a:buNone/>
                       </a:pPr>
                       <a:r>
-                        <a:rPr lang="en-US" sz="1300" dirty="0">
+                        <a:rPr lang="en-US" sz="1500" dirty="0">
                           <a:solidFill>
                             <a:srgbClr val="141B26"/>
                           </a:solidFill>
@@ -6793,7 +6698,7 @@
                         </a:rPr>
                         <a:t>V (normal)</a:t>
                       </a:r>
-                      <a:endParaRPr lang="en-US" sz="1300" dirty="0">
+                      <a:endParaRPr lang="en-US" sz="1500" dirty="0">
                         <a:latin typeface="Calibri" charset="0"/>
                         <a:ea typeface="Calibri" charset="0"/>
                         <a:cs typeface="Calibri" charset="0"/>
@@ -6848,7 +6753,7 @@
                         <a:buNone/>
                       </a:pPr>
                       <a:r>
-                        <a:rPr lang="en-US" sz="1300" dirty="0">
+                        <a:rPr lang="en-US" sz="1500" dirty="0">
                           <a:solidFill>
                             <a:srgbClr val="141B26"/>
                           </a:solidFill>
@@ -6858,7 +6763,7 @@
                         </a:rPr>
                         <a:t>TAC CAC GTA GAC TGA GGA CTC CTC</a:t>
                       </a:r>
-                      <a:endParaRPr lang="en-US" sz="1300" dirty="0">
+                      <a:endParaRPr lang="en-US" sz="1500" dirty="0">
                         <a:latin typeface="Calibri" charset="0"/>
                         <a:ea typeface="Calibri" charset="0"/>
                         <a:cs typeface="Calibri" charset="0"/>
@@ -6913,7 +6818,7 @@
                         <a:buNone/>
                       </a:pPr>
                       <a:r>
-                        <a:rPr lang="en-US" sz="1300" dirty="0">
+                        <a:rPr lang="en-US" sz="1500" dirty="0">
                           <a:solidFill>
                             <a:srgbClr val="141B26"/>
                           </a:solidFill>
@@ -6923,7 +6828,7 @@
                         </a:rPr>
                         <a:t>normal</a:t>
                       </a:r>
-                      <a:endParaRPr lang="en-US" sz="1300" dirty="0">
+                      <a:endParaRPr lang="en-US" sz="1500" dirty="0">
                         <a:latin typeface="Calibri" charset="0"/>
                         <a:ea typeface="Calibri" charset="0"/>
                         <a:cs typeface="Calibri" charset="0"/>
@@ -6980,7 +6885,7 @@
                         <a:buNone/>
                       </a:pPr>
                       <a:r>
-                        <a:rPr lang="en-US" sz="1300" dirty="0">
+                        <a:rPr lang="en-US" sz="1500" dirty="0">
                           <a:solidFill>
                             <a:srgbClr val="141B26"/>
                           </a:solidFill>
@@ -6990,7 +6895,7 @@
                         </a:rPr>
                         <a:t>W</a:t>
                       </a:r>
-                      <a:endParaRPr lang="en-US" sz="1300" dirty="0">
+                      <a:endParaRPr lang="en-US" sz="1500" dirty="0">
                         <a:latin typeface="Calibri" charset="0"/>
                         <a:ea typeface="Calibri" charset="0"/>
                         <a:cs typeface="Calibri" charset="0"/>
@@ -7045,7 +6950,7 @@
                         <a:buNone/>
                       </a:pPr>
                       <a:r>
-                        <a:rPr lang="en-US" sz="1300" dirty="0">
+                        <a:rPr lang="en-US" sz="1500" dirty="0">
                           <a:solidFill>
                             <a:srgbClr val="141B26"/>
                           </a:solidFill>
@@ -7055,7 +6960,7 @@
                         </a:rPr>
                         <a:t>TAC CAC GTA GAC TGA GGA CTC CTC</a:t>
                       </a:r>
-                      <a:endParaRPr lang="en-US" sz="1300" dirty="0">
+                      <a:endParaRPr lang="en-US" sz="1500" dirty="0">
                         <a:latin typeface="Calibri" charset="0"/>
                         <a:ea typeface="Calibri" charset="0"/>
                         <a:cs typeface="Calibri" charset="0"/>
@@ -7110,7 +7015,7 @@
                         <a:buNone/>
                       </a:pPr>
                       <a:r>
-                        <a:rPr lang="en-US" sz="1300" dirty="0">
+                        <a:rPr lang="en-US" sz="1500" dirty="0">
                           <a:solidFill>
                             <a:srgbClr val="141B26"/>
                           </a:solidFill>
@@ -7120,7 +7025,7 @@
                         </a:rPr>
                         <a:t>normal</a:t>
                       </a:r>
-                      <a:endParaRPr lang="en-US" sz="1300" dirty="0">
+                      <a:endParaRPr lang="en-US" sz="1500" dirty="0">
                         <a:latin typeface="Calibri" charset="0"/>
                         <a:ea typeface="Calibri" charset="0"/>
                         <a:cs typeface="Calibri" charset="0"/>
@@ -7177,7 +7082,7 @@
                         <a:buNone/>
                       </a:pPr>
                       <a:r>
-                        <a:rPr lang="en-US" sz="1300" dirty="0">
+                        <a:rPr lang="en-US" sz="1500" dirty="0">
                           <a:solidFill>
                             <a:srgbClr val="141B26"/>
                           </a:solidFill>
@@ -7187,7 +7092,7 @@
                         </a:rPr>
                         <a:t>X</a:t>
                       </a:r>
-                      <a:endParaRPr lang="en-US" sz="1300" dirty="0">
+                      <a:endParaRPr lang="en-US" sz="1500" dirty="0">
                         <a:latin typeface="Calibri" charset="0"/>
                         <a:ea typeface="Calibri" charset="0"/>
                         <a:cs typeface="Calibri" charset="0"/>
@@ -7242,7 +7147,7 @@
                         <a:buNone/>
                       </a:pPr>
                       <a:r>
-                        <a:rPr lang="en-US" sz="1300" dirty="0">
+                        <a:rPr lang="en-US" sz="1500" dirty="0">
                           <a:solidFill>
                             <a:srgbClr val="141B26"/>
                           </a:solidFill>
@@ -7252,7 +7157,7 @@
                         </a:rPr>
                         <a:t>TAC CAC GTA GAC TGA GGA CAC CTC</a:t>
                       </a:r>
-                      <a:endParaRPr lang="en-US" sz="1300" dirty="0">
+                      <a:endParaRPr lang="en-US" sz="1500" dirty="0">
                         <a:latin typeface="Calibri" charset="0"/>
                         <a:ea typeface="Calibri" charset="0"/>
                         <a:cs typeface="Calibri" charset="0"/>
@@ -7307,7 +7212,7 @@
                         <a:buNone/>
                       </a:pPr>
                       <a:r>
-                        <a:rPr lang="en-US" sz="1300" dirty="0">
+                        <a:rPr lang="en-US" sz="1500" dirty="0">
                           <a:solidFill>
                             <a:srgbClr val="141B26"/>
                           </a:solidFill>
@@ -7317,7 +7222,7 @@
                         </a:rPr>
                         <a:t>faulty</a:t>
                       </a:r>
-                      <a:endParaRPr lang="en-US" sz="1300" dirty="0">
+                      <a:endParaRPr lang="en-US" sz="1500" dirty="0">
                         <a:latin typeface="Calibri" charset="0"/>
                         <a:ea typeface="Calibri" charset="0"/>
                         <a:cs typeface="Calibri" charset="0"/>
@@ -7374,7 +7279,7 @@
                         <a:buNone/>
                       </a:pPr>
                       <a:r>
-                        <a:rPr lang="en-US" sz="1300" dirty="0">
+                        <a:rPr lang="en-US" sz="1500" dirty="0">
                           <a:solidFill>
                             <a:srgbClr val="141B26"/>
                           </a:solidFill>
@@ -7384,7 +7289,7 @@
                         </a:rPr>
                         <a:t>Y</a:t>
                       </a:r>
-                      <a:endParaRPr lang="en-US" sz="1300" dirty="0">
+                      <a:endParaRPr lang="en-US" sz="1500" dirty="0">
                         <a:latin typeface="Calibri" charset="0"/>
                         <a:ea typeface="Calibri" charset="0"/>
                         <a:cs typeface="Calibri" charset="0"/>
@@ -7439,7 +7344,7 @@
                         <a:buNone/>
                       </a:pPr>
                       <a:r>
-                        <a:rPr lang="en-US" sz="1300" dirty="0">
+                        <a:rPr lang="en-US" sz="1500" dirty="0">
                           <a:solidFill>
                             <a:srgbClr val="141B26"/>
                           </a:solidFill>
@@ -7449,7 +7354,7 @@
                         </a:rPr>
                         <a:t>TAC CAC GTA GAC TGA GGA TTC CTC</a:t>
                       </a:r>
-                      <a:endParaRPr lang="en-US" sz="1300" dirty="0">
+                      <a:endParaRPr lang="en-US" sz="1500" dirty="0">
                         <a:latin typeface="Calibri" charset="0"/>
                         <a:ea typeface="Calibri" charset="0"/>
                         <a:cs typeface="Calibri" charset="0"/>
@@ -7504,7 +7409,7 @@
                         <a:buNone/>
                       </a:pPr>
                       <a:r>
-                        <a:rPr lang="en-US" sz="1300" dirty="0">
+                        <a:rPr lang="en-US" sz="1500" dirty="0">
                           <a:solidFill>
                             <a:srgbClr val="141B26"/>
                           </a:solidFill>
@@ -7514,7 +7419,7 @@
                         </a:rPr>
                         <a:t>faulty</a:t>
                       </a:r>
-                      <a:endParaRPr lang="en-US" sz="1300" dirty="0">
+                      <a:endParaRPr lang="en-US" sz="1500" dirty="0">
                         <a:latin typeface="Calibri" charset="0"/>
                         <a:ea typeface="Calibri" charset="0"/>
                         <a:cs typeface="Calibri" charset="0"/>
@@ -7571,7 +7476,7 @@
                         <a:buNone/>
                       </a:pPr>
                       <a:r>
-                        <a:rPr lang="en-US" sz="1300" dirty="0">
+                        <a:rPr lang="en-US" sz="1500" dirty="0">
                           <a:solidFill>
                             <a:srgbClr val="141B26"/>
                           </a:solidFill>
@@ -7581,7 +7486,7 @@
                         </a:rPr>
                         <a:t>Z</a:t>
                       </a:r>
-                      <a:endParaRPr lang="en-US" sz="1300" dirty="0">
+                      <a:endParaRPr lang="en-US" sz="1500" dirty="0">
                         <a:latin typeface="Calibri" charset="0"/>
                         <a:ea typeface="Calibri" charset="0"/>
                         <a:cs typeface="Calibri" charset="0"/>
@@ -7636,7 +7541,7 @@
                         <a:buNone/>
                       </a:pPr>
                       <a:r>
-                        <a:rPr lang="en-US" sz="1300" dirty="0">
+                        <a:rPr lang="en-US" sz="1500" dirty="0">
                           <a:solidFill>
                             <a:srgbClr val="141B26"/>
                           </a:solidFill>
@@ -7646,7 +7551,7 @@
                         </a:rPr>
                         <a:t>TAC CAC GTA GAC TGA GGA CTC CTC</a:t>
                       </a:r>
-                      <a:endParaRPr lang="en-US" sz="1300" dirty="0">
+                      <a:endParaRPr lang="en-US" sz="1500" dirty="0">
                         <a:latin typeface="Calibri" charset="0"/>
                         <a:ea typeface="Calibri" charset="0"/>
                         <a:cs typeface="Calibri" charset="0"/>
@@ -7701,7 +7606,7 @@
                         <a:buNone/>
                       </a:pPr>
                       <a:r>
-                        <a:rPr lang="en-US" sz="1300" dirty="0">
+                        <a:rPr lang="en-US" sz="1500" dirty="0">
                           <a:solidFill>
                             <a:srgbClr val="141B26"/>
                           </a:solidFill>
@@ -7711,7 +7616,7 @@
                         </a:rPr>
                         <a:t>normal</a:t>
                       </a:r>
-                      <a:endParaRPr lang="en-US" sz="1300" dirty="0">
+                      <a:endParaRPr lang="en-US" sz="1500" dirty="0">
                         <a:latin typeface="Calibri" charset="0"/>
                         <a:ea typeface="Calibri" charset="0"/>
                         <a:cs typeface="Calibri" charset="0"/>
@@ -7780,81 +7685,79 @@
           <a:ln/>
         </p:spPr>
         <p:txBody>
-          <a:bodyPr wrap="square" lIns="0" tIns="0" rIns="0" bIns="0" rtlCol="0" anchor="t">
-            <a:normAutofit/>
-          </a:bodyPr>
-          <a:lstStyle/>
-          <a:p>
-            <a:pPr marL="228600" indent="-228600">
+          <a:bodyPr wrap="square" lIns="0" tIns="0" rIns="0" bIns="0" rtlCol="0" anchor="t"/>
+          <a:lstStyle/>
+          <a:p>
+            <a:pPr marL="304800" indent="-304800">
               <a:spcAft>
-                <a:spcPts val="600"/>
+                <a:spcPts val="800"/>
               </a:spcAft>
               <a:buSzPct val="100000"/>
               <a:buChar char="•"/>
             </a:pPr>
             <a:r>
-              <a:rPr lang="en-US" sz="1500" dirty="0">
+              <a:rPr lang="en-US" sz="1800" dirty="0">
                 <a:solidFill>
                   <a:srgbClr val="141B26"/>
                 </a:solidFill>
               </a:rPr>
               <a:t>A gene is a sequence of DNA letters.</a:t>
             </a:r>
-            <a:endParaRPr lang="en-US" sz="1500" dirty="0"/>
-          </a:p>
-          <a:p>
-            <a:pPr marL="228600" indent="-228600">
+            <a:endParaRPr lang="en-US" sz="1800" dirty="0"/>
+          </a:p>
+          <a:p>
+            <a:pPr marL="304800" indent="-304800">
               <a:spcAft>
-                <a:spcPts val="600"/>
+                <a:spcPts val="800"/>
               </a:spcAft>
               <a:buSzPct val="100000"/>
               <a:buChar char="•"/>
             </a:pPr>
             <a:r>
-              <a:rPr lang="en-US" sz="1500" dirty="0">
+              <a:rPr lang="en-US" sz="1800" dirty="0">
                 <a:solidFill>
                   <a:srgbClr val="141B26"/>
                 </a:solidFill>
               </a:rPr>
               <a:t>A changed sequence can make a faulty protein.</a:t>
             </a:r>
-            <a:endParaRPr lang="en-US" sz="1500" dirty="0"/>
-          </a:p>
-          <a:p>
-            <a:pPr marL="228600" indent="-228600">
+            <a:endParaRPr lang="en-US" sz="1800" dirty="0"/>
+          </a:p>
+          <a:p>
+            <a:pPr marL="304800" indent="-304800">
               <a:spcAft>
-                <a:spcPts val="600"/>
+                <a:spcPts val="800"/>
               </a:spcAft>
               <a:buSzPct val="100000"/>
               <a:buChar char="•"/>
             </a:pPr>
             <a:r>
-              <a:rPr lang="en-US" sz="1500" dirty="0">
+              <a:rPr lang="en-US" sz="1800" dirty="0">
                 <a:solidFill>
                   <a:srgbClr val="141B26"/>
                 </a:solidFill>
               </a:rPr>
               <a:t>Faulty haemoglobin causes sickle cell disease.</a:t>
             </a:r>
-            <a:endParaRPr lang="en-US" sz="1500" dirty="0"/>
-          </a:p>
-          <a:p>
-            <a:pPr marL="228600" indent="-228600">
+            <a:endParaRPr lang="en-US" sz="1800" dirty="0"/>
+          </a:p>
+          <a:p>
+            <a:pPr marL="304800" indent="-304800">
               <a:spcAft>
-                <a:spcPts val="600"/>
+                <a:spcPts val="800"/>
               </a:spcAft>
               <a:buSzPct val="100000"/>
               <a:buChar char="•"/>
             </a:pPr>
             <a:r>
-              <a:rPr lang="en-US" sz="1500" dirty="0">
+              <a:rPr lang="en-US" sz="1800" dirty="0">
                 <a:solidFill>
                   <a:srgbClr val="141B26"/>
                 </a:solidFill>
               </a:rPr>
               <a:t>Which sequences differ from V?</a:t>
             </a:r>
-            <a:endParaRPr lang="en-US" sz="1500" dirty="0"/>
+            <a:endParaRPr lang="en-US" sz="1800" dirty="0"/>
           </a:p>
         </p:txBody>
       </p:sp>
@@ -7901,16 +7804,14 @@
           <a:ln/>
         </p:spPr>
         <p:txBody>
-          <a:bodyPr wrap="square" lIns="0" tIns="0" rIns="0" bIns="0" rtlCol="0" anchor="ctr">
-            <a:normAutofit/>
-          </a:bodyPr>
+          <a:bodyPr wrap="square" lIns="0" tIns="0" rIns="0" bIns="0" rtlCol="0" anchor="ctr"/>
           <a:lstStyle/>
           <a:p>
             <a:pPr indent="0" marL="0">
               <a:buNone/>
             </a:pPr>
             <a:r>
-              <a:rPr lang="en-US" sz="1400" b="1" dirty="0">
+              <a:rPr lang="en-US" sz="1700" b="1" dirty="0">
                 <a:solidFill>
                   <a:srgbClr val="7B3A8E"/>
                 </a:solidFill>
@@ -7921,14 +7822,14 @@
               <a:buNone/>
             </a:pPr>
             <a:r>
-              <a:rPr lang="en-US" sz="1400" dirty="0">
+              <a:rPr lang="en-US" sz="1700" dirty="0">
                 <a:solidFill>
                   <a:srgbClr val="141B26"/>
                 </a:solidFill>
               </a:rPr>
               <a:t>Change the sequence, change the protein, and a disorder can result.</a:t>
             </a:r>
-            <a:endParaRPr lang="en-US" sz="1400" dirty="0"/>
+            <a:endParaRPr lang="en-US" sz="1700" dirty="0"/>
           </a:p>
         </p:txBody>
       </p:sp>
@@ -8111,8 +8012,8 @@
         </p:nvSpPr>
         <p:spPr>
           <a:xfrm>
-            <a:off x="548640" y="6053328"/>
-            <a:ext cx="9601200" cy="292608"/>
+            <a:off x="548640" y="6035040"/>
+            <a:ext cx="9601200" cy="310896"/>
           </a:xfrm>
           <a:prstGeom prst="rect">
             <a:avLst/>
@@ -8128,7 +8029,7 @@
               <a:buNone/>
             </a:pPr>
             <a:r>
-              <a:rPr lang="en-US" sz="1200" b="1" dirty="0">
+              <a:rPr lang="en-US" sz="1400" b="1" dirty="0">
                 <a:solidFill>
                   <a:srgbClr val="7B3A8E"/>
                 </a:solidFill>
@@ -8139,14 +8040,14 @@
               <a:buNone/>
             </a:pPr>
             <a:r>
-              <a:rPr lang="en-US" sz="1200" dirty="0">
+              <a:rPr lang="en-US" sz="1400" dirty="0">
                 <a:solidFill>
                   <a:srgbClr val="7B3A8E"/>
                 </a:solidFill>
               </a:rPr>
               <a:t>genetic test   ·   genetic disorder   ·   chromosome</a:t>
             </a:r>
-            <a:endParaRPr lang="en-US" sz="1200" dirty="0"/>
+            <a:endParaRPr lang="en-US" sz="1400" dirty="0"/>
           </a:p>
         </p:txBody>
       </p:sp>
@@ -8168,81 +8069,79 @@
           <a:ln/>
         </p:spPr>
         <p:txBody>
-          <a:bodyPr wrap="square" lIns="0" tIns="0" rIns="0" bIns="0" rtlCol="0" anchor="t">
-            <a:normAutofit/>
-          </a:bodyPr>
-          <a:lstStyle/>
-          <a:p>
-            <a:pPr marL="228600" indent="-228600">
+          <a:bodyPr wrap="square" lIns="0" tIns="0" rIns="0" bIns="0" rtlCol="0" anchor="t"/>
+          <a:lstStyle/>
+          <a:p>
+            <a:pPr marL="304800" indent="-304800">
               <a:spcAft>
-                <a:spcPts val="600"/>
+                <a:spcPts val="800"/>
               </a:spcAft>
               <a:buSzPct val="100000"/>
               <a:buChar char="•"/>
             </a:pPr>
             <a:r>
-              <a:rPr lang="en-US" sz="1700" dirty="0">
+              <a:rPr lang="en-US" sz="2000" dirty="0">
                 <a:solidFill>
                   <a:srgbClr val="141B26"/>
                 </a:solidFill>
               </a:rPr>
               <a:t>A genetic test looks at the sequence of a gene, or at a person's chromosomes.</a:t>
             </a:r>
-            <a:endParaRPr lang="en-US" sz="1700" dirty="0"/>
-          </a:p>
-          <a:p>
-            <a:pPr marL="228600" indent="-228600">
+            <a:endParaRPr lang="en-US" sz="2000" dirty="0"/>
+          </a:p>
+          <a:p>
+            <a:pPr marL="304800" indent="-304800">
               <a:spcAft>
-                <a:spcPts val="600"/>
+                <a:spcPts val="800"/>
               </a:spcAft>
               <a:buSzPct val="100000"/>
               <a:buChar char="•"/>
             </a:pPr>
             <a:r>
-              <a:rPr lang="en-US" sz="1700" dirty="0">
+              <a:rPr lang="en-US" sz="2000" dirty="0">
                 <a:solidFill>
                   <a:srgbClr val="141B26"/>
                 </a:solidFill>
               </a:rPr>
               <a:t>Tests are done on newborn babies, on people with symptoms, and on couples who want to start a family.</a:t>
             </a:r>
-            <a:endParaRPr lang="en-US" sz="1700" dirty="0"/>
-          </a:p>
-          <a:p>
-            <a:pPr marL="228600" indent="-228600">
+            <a:endParaRPr lang="en-US" sz="2000" dirty="0"/>
+          </a:p>
+          <a:p>
+            <a:pPr marL="304800" indent="-304800">
               <a:spcAft>
-                <a:spcPts val="600"/>
+                <a:spcPts val="800"/>
               </a:spcAft>
               <a:buSzPct val="100000"/>
               <a:buChar char="•"/>
             </a:pPr>
             <a:r>
-              <a:rPr lang="en-US" sz="1700" dirty="0">
+              <a:rPr lang="en-US" sz="2000" dirty="0">
                 <a:solidFill>
                   <a:srgbClr val="141B26"/>
                 </a:solidFill>
               </a:rPr>
               <a:t>A chromosome test can show an extra chromosome: an extra chromosome 21 causes Down's syndrome.</a:t>
             </a:r>
-            <a:endParaRPr lang="en-US" sz="1700" dirty="0"/>
-          </a:p>
-          <a:p>
-            <a:pPr marL="228600" indent="-228600">
+            <a:endParaRPr lang="en-US" sz="2000" dirty="0"/>
+          </a:p>
+          <a:p>
+            <a:pPr marL="304800" indent="-304800">
               <a:spcAft>
-                <a:spcPts val="600"/>
+                <a:spcPts val="800"/>
               </a:spcAft>
               <a:buSzPct val="100000"/>
               <a:buChar char="•"/>
             </a:pPr>
             <a:r>
-              <a:rPr lang="en-US" sz="1700" dirty="0">
+              <a:rPr lang="en-US" sz="2000" dirty="0">
                 <a:solidFill>
                   <a:srgbClr val="141B26"/>
                 </a:solidFill>
               </a:rPr>
               <a:t>Tests are becoming cheaper and faster, so they are used more and more.</a:t>
             </a:r>
-            <a:endParaRPr lang="en-US" sz="1700" dirty="0"/>
+            <a:endParaRPr lang="en-US" sz="2000" dirty="0"/>
           </a:p>
         </p:txBody>
       </p:sp>
@@ -8279,7 +8178,7 @@
         <p:spPr>
           <a:xfrm>
             <a:off x="6583680" y="4983480"/>
-            <a:ext cx="5029200" cy="502920"/>
+            <a:ext cx="5029200" cy="548640"/>
           </a:xfrm>
           <a:prstGeom prst="rect">
             <a:avLst/>
@@ -8295,7 +8194,7 @@
               <a:buNone/>
             </a:pPr>
             <a:r>
-              <a:rPr lang="en-US" sz="1100" dirty="0">
+              <a:rPr lang="en-US" sz="1300" dirty="0">
                 <a:solidFill>
                   <a:srgbClr val="141B26"/>
                 </a:solidFill>
@@ -8305,21 +8204,21 @@
             <a:pPr algn="l" indent="0" marL="0">
               <a:buNone/>
             </a:pPr>
-            <a:endParaRPr lang="en-US" sz="1100" dirty="0"/>
+            <a:endParaRPr lang="en-US" sz="1300" dirty="0"/>
           </a:p>
           <a:p>
             <a:pPr algn="l" indent="0" marL="0">
               <a:buNone/>
             </a:pPr>
             <a:r>
-              <a:rPr lang="en-US" sz="800" dirty="0">
+              <a:rPr lang="en-US" sz="900" dirty="0">
                 <a:solidFill>
                   <a:srgbClr val="5B6574"/>
                 </a:solidFill>
               </a:rPr>
               <a:t>Image: Can H., CC BY 2.0, via Wikimedia Commons</a:t>
             </a:r>
-            <a:endParaRPr lang="en-US" sz="1100" dirty="0"/>
+            <a:endParaRPr lang="en-US" sz="1300" dirty="0"/>
           </a:p>
         </p:txBody>
       </p:sp>
@@ -8366,16 +8265,14 @@
           <a:ln/>
         </p:spPr>
         <p:txBody>
-          <a:bodyPr wrap="square" lIns="0" tIns="0" rIns="0" bIns="0" rtlCol="0" anchor="ctr">
-            <a:normAutofit/>
-          </a:bodyPr>
+          <a:bodyPr wrap="square" lIns="0" tIns="0" rIns="0" bIns="0" rtlCol="0" anchor="ctr"/>
           <a:lstStyle/>
           <a:p>
             <a:pPr indent="0" marL="0">
               <a:buNone/>
             </a:pPr>
             <a:r>
-              <a:rPr lang="en-US" sz="1400" b="1" dirty="0">
+              <a:rPr lang="en-US" sz="1700" b="1" dirty="0">
                 <a:solidFill>
                   <a:srgbClr val="7B3A8E"/>
                 </a:solidFill>
@@ -8386,14 +8283,14 @@
               <a:buNone/>
             </a:pPr>
             <a:r>
-              <a:rPr lang="en-US" sz="1400" dirty="0">
+              <a:rPr lang="en-US" sz="1700" dirty="0">
                 <a:solidFill>
                   <a:srgbClr val="141B26"/>
                 </a:solidFill>
               </a:rPr>
               <a:t>Genetic tests read DNA sequences or count and check chromosomes.</a:t>
             </a:r>
-            <a:endParaRPr lang="en-US" sz="1400" dirty="0"/>
+            <a:endParaRPr lang="en-US" sz="1700" dirty="0"/>
           </a:p>
         </p:txBody>
       </p:sp>
@@ -8576,8 +8473,8 @@
         </p:nvSpPr>
         <p:spPr>
           <a:xfrm>
-            <a:off x="548640" y="6053328"/>
-            <a:ext cx="9601200" cy="292608"/>
+            <a:off x="548640" y="6035040"/>
+            <a:ext cx="9601200" cy="310896"/>
           </a:xfrm>
           <a:prstGeom prst="rect">
             <a:avLst/>
@@ -8593,7 +8490,7 @@
               <a:buNone/>
             </a:pPr>
             <a:r>
-              <a:rPr lang="en-US" sz="1200" b="1" dirty="0">
+              <a:rPr lang="en-US" sz="1400" b="1" dirty="0">
                 <a:solidFill>
                   <a:srgbClr val="7B3A8E"/>
                 </a:solidFill>
@@ -8604,14 +8501,14 @@
               <a:buNone/>
             </a:pPr>
             <a:r>
-              <a:rPr lang="en-US" sz="1200" dirty="0">
+              <a:rPr lang="en-US" sz="1400" dirty="0">
                 <a:solidFill>
                   <a:srgbClr val="7B3A8E"/>
                 </a:solidFill>
               </a:rPr>
               <a:t>genetic counsellor   ·   probability   ·   cystic fibrosis</a:t>
             </a:r>
-            <a:endParaRPr lang="en-US" sz="1200" dirty="0"/>
+            <a:endParaRPr lang="en-US" sz="1400" dirty="0"/>
           </a:p>
         </p:txBody>
       </p:sp>
@@ -8633,81 +8530,79 @@
           <a:ln/>
         </p:spPr>
         <p:txBody>
-          <a:bodyPr wrap="square" lIns="0" tIns="0" rIns="0" bIns="0" rtlCol="0" anchor="t">
-            <a:normAutofit/>
-          </a:bodyPr>
-          <a:lstStyle/>
-          <a:p>
-            <a:pPr marL="228600" indent="-228600">
+          <a:bodyPr wrap="square" lIns="0" tIns="0" rIns="0" bIns="0" rtlCol="0" anchor="t"/>
+          <a:lstStyle/>
+          <a:p>
+            <a:pPr marL="304800" indent="-304800">
               <a:spcAft>
-                <a:spcPts val="600"/>
+                <a:spcPts val="800"/>
               </a:spcAft>
               <a:buSzPct val="100000"/>
               <a:buChar char="•"/>
             </a:pPr>
             <a:r>
-              <a:rPr lang="en-US" sz="1700" dirty="0">
+              <a:rPr lang="en-US" sz="2000" dirty="0">
                 <a:solidFill>
                   <a:srgbClr val="141B26"/>
                 </a:solidFill>
               </a:rPr>
               <a:t>Explains test results in simple words.</a:t>
             </a:r>
-            <a:endParaRPr lang="en-US" sz="1700" dirty="0"/>
-          </a:p>
-          <a:p>
-            <a:pPr marL="228600" indent="-228600">
+            <a:endParaRPr lang="en-US" sz="2000" dirty="0"/>
+          </a:p>
+          <a:p>
+            <a:pPr marL="304800" indent="-304800">
               <a:spcAft>
-                <a:spcPts val="600"/>
+                <a:spcPts val="800"/>
               </a:spcAft>
               <a:buSzPct val="100000"/>
               <a:buChar char="•"/>
             </a:pPr>
             <a:r>
-              <a:rPr lang="en-US" sz="1700" dirty="0">
+              <a:rPr lang="en-US" sz="2000" dirty="0">
                 <a:solidFill>
                   <a:srgbClr val="141B26"/>
                 </a:solidFill>
               </a:rPr>
               <a:t>Works out and explains the probability of passing a condition on.</a:t>
             </a:r>
-            <a:endParaRPr lang="en-US" sz="1700" dirty="0"/>
-          </a:p>
-          <a:p>
-            <a:pPr marL="228600" indent="-228600">
+            <a:endParaRPr lang="en-US" sz="2000" dirty="0"/>
+          </a:p>
+          <a:p>
+            <a:pPr marL="304800" indent="-304800">
               <a:spcAft>
-                <a:spcPts val="600"/>
+                <a:spcPts val="800"/>
               </a:spcAft>
               <a:buSzPct val="100000"/>
               <a:buChar char="•"/>
             </a:pPr>
             <a:r>
-              <a:rPr lang="en-US" sz="1700" dirty="0">
+              <a:rPr lang="en-US" sz="2000" dirty="0">
                 <a:solidFill>
                   <a:srgbClr val="141B26"/>
                 </a:solidFill>
               </a:rPr>
               <a:t>Example: both parents carry a faulty CFTR gene. Each child has a 25% (1 in 4) chance of cystic fibrosis.</a:t>
             </a:r>
-            <a:endParaRPr lang="en-US" sz="1700" dirty="0"/>
-          </a:p>
-          <a:p>
-            <a:pPr marL="228600" indent="-228600">
+            <a:endParaRPr lang="en-US" sz="2000" dirty="0"/>
+          </a:p>
+          <a:p>
+            <a:pPr marL="304800" indent="-304800">
               <a:spcAft>
-                <a:spcPts val="600"/>
+                <a:spcPts val="800"/>
               </a:spcAft>
               <a:buSzPct val="100000"/>
               <a:buChar char="•"/>
             </a:pPr>
             <a:r>
-              <a:rPr lang="en-US" sz="1700" dirty="0">
+              <a:rPr lang="en-US" sz="2000" dirty="0">
                 <a:solidFill>
                   <a:srgbClr val="141B26"/>
                 </a:solidFill>
               </a:rPr>
               <a:t>Explains the options. The family decides; the counsellor does not decide for them.</a:t>
             </a:r>
-            <a:endParaRPr lang="en-US" sz="1700" dirty="0"/>
+            <a:endParaRPr lang="en-US" sz="2000" dirty="0"/>
           </a:p>
         </p:txBody>
       </p:sp>
@@ -8754,16 +8649,14 @@
           <a:ln/>
         </p:spPr>
         <p:txBody>
-          <a:bodyPr wrap="square" lIns="0" tIns="0" rIns="0" bIns="0" rtlCol="0" anchor="ctr">
-            <a:normAutofit/>
-          </a:bodyPr>
+          <a:bodyPr wrap="square" lIns="0" tIns="0" rIns="0" bIns="0" rtlCol="0" anchor="ctr"/>
           <a:lstStyle/>
           <a:p>
             <a:pPr indent="0" marL="0">
               <a:buNone/>
             </a:pPr>
             <a:r>
-              <a:rPr lang="en-US" sz="1400" b="1" dirty="0">
+              <a:rPr lang="en-US" sz="1700" b="1" dirty="0">
                 <a:solidFill>
                   <a:srgbClr val="7B3A8E"/>
                 </a:solidFill>
@@ -8774,14 +8667,14 @@
               <a:buNone/>
             </a:pPr>
             <a:r>
-              <a:rPr lang="en-US" sz="1400" dirty="0">
+              <a:rPr lang="en-US" sz="1700" dirty="0">
                 <a:solidFill>
                   <a:srgbClr val="141B26"/>
                 </a:solidFill>
               </a:rPr>
               <a:t>The counsellor explains the science and the chances; the decision belongs to the family.</a:t>
             </a:r>
-            <a:endParaRPr lang="en-US" sz="1400" dirty="0"/>
+            <a:endParaRPr lang="en-US" sz="1700" dirty="0"/>
           </a:p>
         </p:txBody>
       </p:sp>
@@ -8964,8 +8857,8 @@
         </p:nvSpPr>
         <p:spPr>
           <a:xfrm>
-            <a:off x="548640" y="6053328"/>
-            <a:ext cx="9601200" cy="292608"/>
+            <a:off x="548640" y="6035040"/>
+            <a:ext cx="9601200" cy="310896"/>
           </a:xfrm>
           <a:prstGeom prst="rect">
             <a:avLst/>
@@ -8981,7 +8874,7 @@
               <a:buNone/>
             </a:pPr>
             <a:r>
-              <a:rPr lang="en-US" sz="1200" b="1" dirty="0">
+              <a:rPr lang="en-US" sz="1400" b="1" dirty="0">
                 <a:solidFill>
                   <a:srgbClr val="7B3A8E"/>
                 </a:solidFill>
@@ -8992,14 +8885,14 @@
               <a:buNone/>
             </a:pPr>
             <a:r>
-              <a:rPr lang="en-US" sz="1200" dirty="0">
+              <a:rPr lang="en-US" sz="1400" dirty="0">
                 <a:solidFill>
                   <a:srgbClr val="7B3A8E"/>
                 </a:solidFill>
               </a:rPr>
               <a:t>probability   ·   genetic test</a:t>
             </a:r>
-            <a:endParaRPr lang="en-US" sz="1200" dirty="0"/>
+            <a:endParaRPr lang="en-US" sz="1400" dirty="0"/>
           </a:p>
         </p:txBody>
       </p:sp>
@@ -9037,63 +8930,61 @@
           <a:ln/>
         </p:spPr>
         <p:txBody>
-          <a:bodyPr wrap="square" lIns="0" tIns="0" rIns="0" bIns="0" rtlCol="0" anchor="t">
-            <a:normAutofit/>
-          </a:bodyPr>
-          <a:lstStyle/>
-          <a:p>
-            <a:pPr marL="228600" indent="-228600">
+          <a:bodyPr wrap="square" lIns="0" tIns="0" rIns="0" bIns="0" rtlCol="0" anchor="t"/>
+          <a:lstStyle/>
+          <a:p>
+            <a:pPr marL="304800" indent="-304800">
               <a:spcAft>
-                <a:spcPts val="600"/>
+                <a:spcPts val="800"/>
               </a:spcAft>
               <a:buSzPct val="100000"/>
               <a:buChar char="•"/>
             </a:pPr>
             <a:r>
-              <a:rPr lang="en-US" sz="1500" dirty="0">
+              <a:rPr lang="en-US" sz="1800" dirty="0">
                 <a:solidFill>
                   <a:srgbClr val="141B26"/>
                 </a:solidFill>
               </a:rPr>
               <a:t>A test report says: 'The patient has one copy of the E4 variant of the APOE gene. The probability of Alzheimer's disease before 85 is 20%, compared with 13% for the general population.'</a:t>
             </a:r>
-            <a:endParaRPr lang="en-US" sz="1500" dirty="0"/>
-          </a:p>
-          <a:p>
-            <a:pPr marL="228600" indent="-228600">
+            <a:endParaRPr lang="en-US" sz="1800" dirty="0"/>
+          </a:p>
+          <a:p>
+            <a:pPr marL="304800" indent="-304800">
               <a:spcAft>
-                <a:spcPts val="600"/>
+                <a:spcPts val="800"/>
               </a:spcAft>
               <a:buSzPct val="100000"/>
               <a:buChar char="•"/>
             </a:pPr>
             <a:r>
-              <a:rPr lang="en-US" sz="1500" dirty="0">
+              <a:rPr lang="en-US" sz="1800" dirty="0">
                 <a:solidFill>
                   <a:srgbClr val="141B26"/>
                 </a:solidFill>
               </a:rPr>
               <a:t>How would you explain this simply?</a:t>
             </a:r>
-            <a:endParaRPr lang="en-US" sz="1500" dirty="0"/>
-          </a:p>
-          <a:p>
-            <a:pPr marL="228600" indent="-228600">
+            <a:endParaRPr lang="en-US" sz="1800" dirty="0"/>
+          </a:p>
+          <a:p>
+            <a:pPr marL="304800" indent="-304800">
               <a:spcAft>
-                <a:spcPts val="600"/>
+                <a:spcPts val="800"/>
               </a:spcAft>
               <a:buSzPct val="100000"/>
               <a:buChar char="•"/>
             </a:pPr>
             <a:r>
-              <a:rPr lang="en-US" sz="1500" dirty="0">
+              <a:rPr lang="en-US" sz="1800" dirty="0">
                 <a:solidFill>
                   <a:srgbClr val="141B26"/>
                 </a:solidFill>
               </a:rPr>
               <a:t>Is the patient certain to get the disease?</a:t>
             </a:r>
-            <a:endParaRPr lang="en-US" sz="1500" dirty="0"/>
+            <a:endParaRPr lang="en-US" sz="1800" dirty="0"/>
           </a:p>
         </p:txBody>
       </p:sp>
@@ -9140,16 +9031,14 @@
           <a:ln/>
         </p:spPr>
         <p:txBody>
-          <a:bodyPr wrap="square" lIns="0" tIns="0" rIns="0" bIns="0" rtlCol="0" anchor="ctr">
-            <a:normAutofit/>
-          </a:bodyPr>
+          <a:bodyPr wrap="square" lIns="0" tIns="0" rIns="0" bIns="0" rtlCol="0" anchor="ctr"/>
           <a:lstStyle/>
           <a:p>
             <a:pPr indent="0" marL="0">
               <a:buNone/>
             </a:pPr>
             <a:r>
-              <a:rPr lang="en-US" sz="1400" b="1" dirty="0">
+              <a:rPr lang="en-US" sz="1700" b="1" dirty="0">
                 <a:solidFill>
                   <a:srgbClr val="7B3A8E"/>
                 </a:solidFill>
@@ -9160,14 +9049,14 @@
               <a:buNone/>
             </a:pPr>
             <a:r>
-              <a:rPr lang="en-US" sz="1400" dirty="0">
+              <a:rPr lang="en-US" sz="1700" dirty="0">
                 <a:solidFill>
                   <a:srgbClr val="141B26"/>
                 </a:solidFill>
               </a:rPr>
               <a:t>Most test results are probabilities, not certainties: 20% means 80% do not develop the disease.</a:t>
             </a:r>
-            <a:endParaRPr lang="en-US" sz="1400" dirty="0"/>
+            <a:endParaRPr lang="en-US" sz="1700" dirty="0"/>
           </a:p>
         </p:txBody>
       </p:sp>
@@ -9367,14 +9256,14 @@
               <a:buNone/>
             </a:pPr>
             <a:r>
-              <a:rPr lang="en-US" sz="1400" i="1" dirty="0">
+              <a:rPr lang="en-US" sz="1600" i="1" dirty="0">
                 <a:solidFill>
                   <a:srgbClr val="5B6574"/>
                 </a:solidFill>
               </a:rPr>
               <a:t>Mini whiteboards. Short answers.</a:t>
             </a:r>
-            <a:endParaRPr lang="en-US" sz="1400" dirty="0"/>
+            <a:endParaRPr lang="en-US" sz="1600" dirty="0"/>
           </a:p>
         </p:txBody>
       </p:sp>
@@ -9423,16 +9312,14 @@
           <a:ln/>
         </p:spPr>
         <p:txBody>
-          <a:bodyPr wrap="square" lIns="0" tIns="0" rIns="0" bIns="0" rtlCol="0" anchor="ctr">
-            <a:normAutofit/>
-          </a:bodyPr>
+          <a:bodyPr wrap="square" lIns="0" tIns="0" rIns="0" bIns="0" rtlCol="0" anchor="ctr"/>
           <a:lstStyle/>
           <a:p>
             <a:pPr indent="0" marL="0">
               <a:buNone/>
             </a:pPr>
             <a:r>
-              <a:rPr lang="en-US" sz="1600" b="1" dirty="0">
+              <a:rPr lang="en-US" sz="2000" b="1" dirty="0">
                 <a:solidFill>
                   <a:srgbClr val="7B3A8E"/>
                 </a:solidFill>
@@ -9443,14 +9330,14 @@
               <a:buNone/>
             </a:pPr>
             <a:r>
-              <a:rPr lang="en-US" sz="1600" dirty="0">
+              <a:rPr lang="en-US" sz="2000" dirty="0">
                 <a:solidFill>
                   <a:srgbClr val="141B26"/>
                 </a:solidFill>
               </a:rPr>
               <a:t>What two things can a genetic test look at?</a:t>
             </a:r>
-            <a:endParaRPr lang="en-US" sz="1600" dirty="0"/>
+            <a:endParaRPr lang="en-US" sz="2000" dirty="0"/>
           </a:p>
         </p:txBody>
       </p:sp>
@@ -9499,16 +9386,14 @@
           <a:ln/>
         </p:spPr>
         <p:txBody>
-          <a:bodyPr wrap="square" lIns="0" tIns="0" rIns="0" bIns="0" rtlCol="0" anchor="ctr">
-            <a:normAutofit/>
-          </a:bodyPr>
+          <a:bodyPr wrap="square" lIns="0" tIns="0" rIns="0" bIns="0" rtlCol="0" anchor="ctr"/>
           <a:lstStyle/>
           <a:p>
             <a:pPr indent="0" marL="0">
               <a:buNone/>
             </a:pPr>
             <a:r>
-              <a:rPr lang="en-US" sz="1600" b="1" dirty="0">
+              <a:rPr lang="en-US" sz="2000" b="1" dirty="0">
                 <a:solidFill>
                   <a:srgbClr val="7B3A8E"/>
                 </a:solidFill>
@@ -9519,14 +9404,14 @@
               <a:buNone/>
             </a:pPr>
             <a:r>
-              <a:rPr lang="en-US" sz="1600" dirty="0">
+              <a:rPr lang="en-US" sz="2000" dirty="0">
                 <a:solidFill>
                   <a:srgbClr val="141B26"/>
                 </a:solidFill>
               </a:rPr>
               <a:t>How many chromosomes does a person with Down's syndrome have in each body cell?</a:t>
             </a:r>
-            <a:endParaRPr lang="en-US" sz="1600" dirty="0"/>
+            <a:endParaRPr lang="en-US" sz="2000" dirty="0"/>
           </a:p>
         </p:txBody>
       </p:sp>
@@ -9575,16 +9460,14 @@
           <a:ln/>
         </p:spPr>
         <p:txBody>
-          <a:bodyPr wrap="square" lIns="0" tIns="0" rIns="0" bIns="0" rtlCol="0" anchor="ctr">
-            <a:normAutofit/>
-          </a:bodyPr>
+          <a:bodyPr wrap="square" lIns="0" tIns="0" rIns="0" bIns="0" rtlCol="0" anchor="ctr"/>
           <a:lstStyle/>
           <a:p>
             <a:pPr indent="0" marL="0">
               <a:buNone/>
             </a:pPr>
             <a:r>
-              <a:rPr lang="en-US" sz="1600" b="1" dirty="0">
+              <a:rPr lang="en-US" sz="2000" b="1" dirty="0">
                 <a:solidFill>
                   <a:srgbClr val="7B3A8E"/>
                 </a:solidFill>
@@ -9595,14 +9478,14 @@
               <a:buNone/>
             </a:pPr>
             <a:r>
-              <a:rPr lang="en-US" sz="1600" dirty="0">
+              <a:rPr lang="en-US" sz="2000" dirty="0">
                 <a:solidFill>
                   <a:srgbClr val="141B26"/>
                 </a:solidFill>
               </a:rPr>
               <a:t>Both parents carry a faulty gene; each child has a 25% chance. Write 25% as a fraction.</a:t>
             </a:r>
-            <a:endParaRPr lang="en-US" sz="1600" dirty="0"/>
+            <a:endParaRPr lang="en-US" sz="2000" dirty="0"/>
           </a:p>
         </p:txBody>
       </p:sp>
@@ -9651,16 +9534,14 @@
           <a:ln/>
         </p:spPr>
         <p:txBody>
-          <a:bodyPr wrap="square" lIns="0" tIns="0" rIns="0" bIns="0" rtlCol="0" anchor="ctr">
-            <a:normAutofit/>
-          </a:bodyPr>
+          <a:bodyPr wrap="square" lIns="0" tIns="0" rIns="0" bIns="0" rtlCol="0" anchor="ctr"/>
           <a:lstStyle/>
           <a:p>
             <a:pPr indent="0" marL="0">
               <a:buNone/>
             </a:pPr>
             <a:r>
-              <a:rPr lang="en-US" sz="1600" b="1" dirty="0">
+              <a:rPr lang="en-US" sz="2000" b="1" dirty="0">
                 <a:solidFill>
                   <a:srgbClr val="7B3A8E"/>
                 </a:solidFill>
@@ -9671,14 +9552,14 @@
               <a:buNone/>
             </a:pPr>
             <a:r>
-              <a:rPr lang="en-US" sz="1600" dirty="0">
+              <a:rPr lang="en-US" sz="2000" dirty="0">
                 <a:solidFill>
                   <a:srgbClr val="141B26"/>
                 </a:solidFill>
               </a:rPr>
               <a:t>Does a 20% probability mean the disease is certain?</a:t>
             </a:r>
-            <a:endParaRPr lang="en-US" sz="1600" dirty="0"/>
+            <a:endParaRPr lang="en-US" sz="2000" dirty="0"/>
           </a:p>
         </p:txBody>
       </p:sp>
@@ -9727,16 +9608,14 @@
           <a:ln/>
         </p:spPr>
         <p:txBody>
-          <a:bodyPr wrap="square" lIns="0" tIns="0" rIns="0" bIns="0" rtlCol="0" anchor="ctr">
-            <a:normAutofit/>
-          </a:bodyPr>
+          <a:bodyPr wrap="square" lIns="0" tIns="0" rIns="0" bIns="0" rtlCol="0" anchor="ctr"/>
           <a:lstStyle/>
           <a:p>
             <a:pPr indent="0" marL="0">
               <a:buNone/>
             </a:pPr>
             <a:r>
-              <a:rPr lang="en-US" sz="1600" b="1" dirty="0">
+              <a:rPr lang="en-US" sz="2000" b="1" dirty="0">
                 <a:solidFill>
                   <a:srgbClr val="7B3A8E"/>
                 </a:solidFill>
@@ -9747,14 +9626,14 @@
               <a:buNone/>
             </a:pPr>
             <a:r>
-              <a:rPr lang="en-US" sz="1600" dirty="0">
+              <a:rPr lang="en-US" sz="2000" dirty="0">
                 <a:solidFill>
                   <a:srgbClr val="141B26"/>
                 </a:solidFill>
               </a:rPr>
               <a:t>Who makes the final decision after genetic counselling?</a:t>
             </a:r>
-            <a:endParaRPr lang="en-US" sz="1600" dirty="0"/>
+            <a:endParaRPr lang="en-US" sz="2000" dirty="0"/>
           </a:p>
         </p:txBody>
       </p:sp>
